--- a/MCG_Project_Qlarity_Summary.pptx
+++ b/MCG_Project_Qlarity_Summary.pptx
@@ -3699,9 +3699,9 @@
                 <a:solidFill>
                   <a:srgbClr val="FFFFFF"/>
                 </a:solidFill>
-                <a:latin typeface="Consolas" pitchFamily="34" charset="0"/>
-                <a:ea typeface="Consolas" pitchFamily="34" charset="-122"/>
-                <a:cs typeface="Consolas" pitchFamily="34" charset="-120"/>
+                <a:latin typeface="Inter" pitchFamily="34" charset="0"/>
+                <a:ea typeface="Inter" pitchFamily="34" charset="-122"/>
+                <a:cs typeface="Inter" pitchFamily="34" charset="-120"/>
               </a:rPr>
               <a:t>npm run deploy</a:t>
             </a:r>

--- a/MCG_Project_Qlarity_Summary.pptx
+++ b/MCG_Project_Qlarity_Summary.pptx
@@ -514,7 +514,7 @@
           <a:p>
             <a:r>
               <a:rPr lang="en-US" dirty="0"/>
-              <a:t/>
+              <a:t>Open here. Project Qlarity — Qlik plus Clarity — is our repeatable framework for demoing the full Qlik Cloud stack end to end. Be clear it is a demo framework, not a product or a customer platform. Set up the arc: a fictional retailer with a messy data estate, walked through four connected acts — Integrations, Governance, Analytics, and AI &amp; Outcomes.</a:t>
             </a:r>
             <a:endParaRPr lang="en-US" dirty="0"/>
           </a:p>
@@ -602,7 +602,7 @@
           <a:p>
             <a:r>
               <a:rPr lang="en-US" dirty="0"/>
-              <a:t/>
+              <a:t>The intelligence layer. Qlik Predict with two AutoML models, Qlik Answers over the knowledge base, the Discovery Agent, and the Qlik MCP Server, plus the agentic data-engineering capabilities. Two honesty callouts: the MCP Server is a preview, and the three governance agents are Qlik Answers capabilities, not separate products or SKUs.</a:t>
             </a:r>
             <a:endParaRPr lang="en-US" dirty="0"/>
           </a:p>
@@ -690,7 +690,7 @@
           <a:p>
             <a:r>
               <a:rPr lang="en-US" dirty="0"/>
-              <a:t/>
+              <a:t>The punchline that makes this a framework, not a one-off. One repo, one command — npm run deploy — driven by the MCG Deploy console, a web wizard on port 3939. Always dry-run first: it previews every change before anything is written, then commit for real. The declarative pipelines import via API as part of the same deployment.</a:t>
             </a:r>
             <a:endParaRPr lang="en-US" dirty="0"/>
           </a:p>
@@ -778,7 +778,7 @@
           <a:p>
             <a:r>
               <a:rPr lang="en-US" dirty="0"/>
-              <a:t/>
+              <a:t>A quick recap of scale, and every figure here ships in the repo — nothing invented. Three decks, 18 scripts, 25 knowledge-base documents, 25 glossary terms, three source feeds, two gold data products, six pipeline tasks, five automations, three simulators, and two Predict models.</a:t>
             </a:r>
             <a:endParaRPr lang="en-US" dirty="0"/>
           </a:p>
@@ -866,7 +866,7 @@
           <a:p>
             <a:r>
               <a:rPr lang="en-US" dirty="0"/>
-              <a:t/>
+              <a:t>Wrap it. Project Qlarity is one repository, one command, the full Qlik stack — a repeatable framework any SE can stand up and present. Point to the resources link for the repository and the demo guide, and offer to walk any of the four acts live.</a:t>
             </a:r>
             <a:endParaRPr lang="en-US" dirty="0"/>
           </a:p>
@@ -954,7 +954,7 @@
           <a:p>
             <a:r>
               <a:rPr lang="en-US" dirty="0"/>
-              <a:t/>
+              <a:t>Frame it plainly: this is a framework for demoing Qlik Cloud, not a platform we are selling. Meridian Commerce Group is our fictional global retailer with data scattered across 47 systems. The whole demo lives in one git repo and stands up with one command through the MCG Deploy console. Land the phrase: a framework, not a product.</a:t>
             </a:r>
             <a:endParaRPr lang="en-US" dirty="0"/>
           </a:p>
@@ -1042,7 +1042,7 @@
           <a:p>
             <a:r>
               <a:rPr lang="en-US" dirty="0"/>
-              <a:t/>
+              <a:t>Set the stakes fast: seven recurring data-quality nightmares, roughly 127 million dollars a year, across 47 fragmented systems with no single source of truth. This is the before. Keep it concrete — WISMO calls, cold-chain spoilage, late deliveries, mismatched addresses, duplicate customers — all tracing back to untrusted data.</a:t>
             </a:r>
             <a:endParaRPr lang="en-US" dirty="0"/>
           </a:p>
@@ -1130,7 +1130,7 @@
           <a:p>
             <a:r>
               <a:rPr lang="en-US" dirty="0"/>
-              <a:t/>
+              <a:t>The spine of every demo, four connected acts. Integrations lands three messy feeds into the Open Lakehouse. Governance turns raw data into trusted data. Analytics publishes gold data products and apps. AI &amp; Outcomes turns trusted data into decisions and action. Each act maps to a live click-path and a Demo2Win script.</a:t>
             </a:r>
             <a:endParaRPr lang="en-US" dirty="0"/>
           </a:p>
@@ -1218,7 +1218,7 @@
           <a:p>
             <a:r>
               <a:rPr lang="en-US" dirty="0"/>
-              <a:t/>
+              <a:t>One picture of the whole flow. Three source feeds — PostgreSQL WMS via CDC, Kafka IoT cold-chain streaming, and Salesforce every 15 minutes — land in the Open Lakehouse on Apache Iceberg, flow bronze to silver to gold, and surface as two governed gold data products that feed apps and AI. No copies; everything downstream reads trusted data.</a:t>
             </a:r>
             <a:endParaRPr lang="en-US" dirty="0"/>
           </a:p>
@@ -1306,7 +1306,7 @@
           <a:p>
             <a:r>
               <a:rPr lang="en-US" dirty="0"/>
-              <a:t/>
+              <a:t>The story-telling layer. Three core decks frame the value and 18 Demo2Win scripts walk it through live. This is what makes the demo repeatable — any SE runs the same narrative the same way, every time.</a:t>
             </a:r>
             <a:endParaRPr lang="en-US" dirty="0"/>
           </a:p>
@@ -1394,7 +1394,7 @@
           <a:p>
             <a:r>
               <a:rPr lang="en-US" dirty="0"/>
-              <a:t/>
+              <a:t>Our flagship enablement asset. Every capability has a script with the same anatomy — a Limbic emotional opening, Tell then Show then Tell, click-by-click steps, a So You Can value chain, and a troubleshooting table. Eighteen modules cover all four acts plus the agentic engineering work.</a:t>
             </a:r>
             <a:endParaRPr lang="en-US" dirty="0"/>
           </a:p>
@@ -1482,7 +1482,7 @@
           <a:p>
             <a:r>
               <a:rPr lang="en-US" dirty="0"/>
-              <a:t/>
+              <a:t>The build layer. Two declarative QTCP pipeline projects, six tasks total, shipped as a VS Code template you can author by hand or with an AI coding agent. Two governed gold data products, and three simulators that generate the intentionally-messy demo data. Flag that declarative pipelines are a Qlik internal preview.</a:t>
             </a:r>
             <a:endParaRPr lang="en-US" dirty="0"/>
           </a:p>
@@ -1570,7 +1570,7 @@
           <a:p>
             <a:r>
               <a:rPr lang="en-US" dirty="0"/>
-              <a:t/>
+              <a:t>The trust layer. A 25-document Qlik Answers knowledge base, 25 business glossary terms as one shared vocabulary, and five Teams automations — plus trust scores, lineage, and stewardship. Governance makes the data trustworthy, the knowledge base and glossary make it understandable, and automations keep it that way in the flow of work.</a:t>
             </a:r>
             <a:endParaRPr lang="en-US" dirty="0"/>
           </a:p>
@@ -1945,7 +1945,7 @@
       </p:grpSpPr>
       <p:pic>
         <p:nvPicPr>
-          <p:cNvPr id="2" name="Image 0" descr="C:\Claude\MCG Full Stack\generators\assets\qlik_cover_bg.png">    </p:cNvPr>
+          <p:cNvPr id="3" name="Image 0" descr="C:\Claude\MCG Full Stack\generators\assets\qlik_cover_bg.png">    </p:cNvPr>
           <p:cNvPicPr>
             <a:picLocks noChangeAspect="1"/>
           </p:cNvPicPr>
@@ -1969,7 +1969,7 @@
       </p:pic>
       <p:pic>
         <p:nvPicPr>
-          <p:cNvPr id="3" name="Image 1" descr="C:\Claude\MCG Full Stack\generators\assets\qlik_logo.png">    </p:cNvPr>
+          <p:cNvPr id="4" name="Image 1" descr="C:\Claude\MCG Full Stack\generators\assets\qlik_logo.png">    </p:cNvPr>
           <p:cNvPicPr>
             <a:picLocks noChangeAspect="1"/>
           </p:cNvPicPr>
@@ -1984,7 +1984,7 @@
         <p:spPr>
           <a:xfrm>
             <a:off x="457200" y="365760"/>
-            <a:ext cx="1280160" cy="566928"/>
+            <a:ext cx="1024128" cy="566928"/>
           </a:xfrm>
           <a:prstGeom prst="rect">
             <a:avLst/>
@@ -1993,7 +1993,7 @@
       </p:pic>
       <p:sp>
         <p:nvSpPr>
-          <p:cNvPr id="4" name="Text 0"/>
+          <p:cNvPr id="5" name="Text 0"/>
           <p:cNvSpPr/>
           <p:nvPr/>
         </p:nvSpPr>
@@ -2032,7 +2032,7 @@
       </p:sp>
       <p:sp>
         <p:nvSpPr>
-          <p:cNvPr id="5" name="Text 1"/>
+          <p:cNvPr id="6" name="Text 1"/>
           <p:cNvSpPr/>
           <p:nvPr/>
         </p:nvSpPr>
@@ -2071,7 +2071,7 @@
       </p:sp>
       <p:sp>
         <p:nvSpPr>
-          <p:cNvPr id="6" name="Text 2"/>
+          <p:cNvPr id="7" name="Text 2"/>
           <p:cNvSpPr/>
           <p:nvPr/>
         </p:nvSpPr>
@@ -2110,7 +2110,7 @@
       </p:sp>
       <p:sp>
         <p:nvSpPr>
-          <p:cNvPr id="7" name="Text 3"/>
+          <p:cNvPr id="8" name="Text 3"/>
           <p:cNvSpPr/>
           <p:nvPr/>
         </p:nvSpPr>
@@ -2141,7 +2141,7 @@
                 <a:ea typeface="Inter" pitchFamily="34" charset="-122"/>
                 <a:cs typeface="Inter" pitchFamily="34" charset="-120"/>
               </a:rPr>
-              <a:t>Qlik + Clarity:  from 7 data-quality nightmares to a trusted, AI-ready platform.</a:t>
+              <a:t>Qlik + Clarity:  a repeatable framework for demoing the full Qlik Cloud stack, end to end.</a:t>
             </a:r>
             <a:endParaRPr lang="en-US" sz="1400" dirty="0"/>
           </a:p>
@@ -2149,7 +2149,7 @@
       </p:sp>
       <p:sp>
         <p:nvSpPr>
-          <p:cNvPr id="8" name="Shape 4"/>
+          <p:cNvPr id="9" name="Shape 4"/>
           <p:cNvSpPr/>
           <p:nvPr/>
         </p:nvSpPr>
@@ -2171,7 +2171,7 @@
       </p:sp>
       <p:sp>
         <p:nvSpPr>
-          <p:cNvPr id="9" name="Text 5"/>
+          <p:cNvPr id="10" name="Text 5"/>
           <p:cNvSpPr/>
           <p:nvPr/>
         </p:nvSpPr>
@@ -2210,7 +2210,7 @@
       </p:sp>
       <p:sp>
         <p:nvSpPr>
-          <p:cNvPr id="10" name="Shape 6"/>
+          <p:cNvPr id="11" name="Shape 6"/>
           <p:cNvSpPr/>
           <p:nvPr/>
         </p:nvSpPr>
@@ -2232,7 +2232,7 @@
       </p:sp>
       <p:sp>
         <p:nvSpPr>
-          <p:cNvPr id="11" name="Text 7"/>
+          <p:cNvPr id="12" name="Text 7"/>
           <p:cNvSpPr/>
           <p:nvPr/>
         </p:nvSpPr>
@@ -2271,7 +2271,7 @@
       </p:sp>
       <p:sp>
         <p:nvSpPr>
-          <p:cNvPr id="12" name="Shape 8"/>
+          <p:cNvPr id="13" name="Shape 8"/>
           <p:cNvSpPr/>
           <p:nvPr/>
         </p:nvSpPr>
@@ -2293,7 +2293,7 @@
       </p:sp>
       <p:sp>
         <p:nvSpPr>
-          <p:cNvPr id="13" name="Text 9"/>
+          <p:cNvPr id="14" name="Text 9"/>
           <p:cNvSpPr/>
           <p:nvPr/>
         </p:nvSpPr>
@@ -2332,7 +2332,7 @@
       </p:sp>
       <p:sp>
         <p:nvSpPr>
-          <p:cNvPr id="14" name="Shape 10"/>
+          <p:cNvPr id="15" name="Shape 10"/>
           <p:cNvSpPr/>
           <p:nvPr/>
         </p:nvSpPr>
@@ -2354,7 +2354,7 @@
       </p:sp>
       <p:sp>
         <p:nvSpPr>
-          <p:cNvPr id="15" name="Text 11"/>
+          <p:cNvPr id="16" name="Text 11"/>
           <p:cNvSpPr/>
           <p:nvPr/>
         </p:nvSpPr>
@@ -2480,7 +2480,7 @@
         <p:spPr>
           <a:xfrm>
             <a:off x="457200" y="6492240"/>
-            <a:ext cx="640080" cy="274320"/>
+            <a:ext cx="493776" cy="274320"/>
           </a:xfrm>
           <a:prstGeom prst="rect">
             <a:avLst/>
@@ -2606,7 +2606,7 @@
       </p:sp>
       <p:sp>
         <p:nvSpPr>
-          <p:cNvPr id="8" name="Shape 5"/>
+          <p:cNvPr id="9" name="Shape 5"/>
           <p:cNvSpPr/>
           <p:nvPr/>
         </p:nvSpPr>
@@ -2628,7 +2628,7 @@
       </p:sp>
       <p:sp>
         <p:nvSpPr>
-          <p:cNvPr id="9" name="Text 6"/>
+          <p:cNvPr id="10" name="Text 6"/>
           <p:cNvSpPr/>
           <p:nvPr/>
         </p:nvSpPr>
@@ -2667,7 +2667,7 @@
       </p:sp>
       <p:sp>
         <p:nvSpPr>
-          <p:cNvPr id="10" name="Text 7"/>
+          <p:cNvPr id="11" name="Text 7"/>
           <p:cNvSpPr/>
           <p:nvPr/>
         </p:nvSpPr>
@@ -2706,7 +2706,7 @@
       </p:sp>
       <p:sp>
         <p:nvSpPr>
-          <p:cNvPr id="11" name="Shape 8"/>
+          <p:cNvPr id="12" name="Shape 8"/>
           <p:cNvSpPr/>
           <p:nvPr/>
         </p:nvSpPr>
@@ -2733,7 +2733,7 @@
       </p:sp>
       <p:sp>
         <p:nvSpPr>
-          <p:cNvPr id="12" name="Shape 9"/>
+          <p:cNvPr id="13" name="Shape 9"/>
           <p:cNvSpPr/>
           <p:nvPr/>
         </p:nvSpPr>
@@ -2755,7 +2755,7 @@
       </p:sp>
       <p:sp>
         <p:nvSpPr>
-          <p:cNvPr id="13" name="Text 10"/>
+          <p:cNvPr id="14" name="Text 10"/>
           <p:cNvSpPr/>
           <p:nvPr/>
         </p:nvSpPr>
@@ -2794,7 +2794,7 @@
       </p:sp>
       <p:sp>
         <p:nvSpPr>
-          <p:cNvPr id="14" name="Shape 11"/>
+          <p:cNvPr id="15" name="Shape 11"/>
           <p:cNvSpPr/>
           <p:nvPr/>
         </p:nvSpPr>
@@ -2826,7 +2826,7 @@
       </p:sp>
       <p:pic>
         <p:nvPicPr>
-          <p:cNvPr id="15" name="Image 1" descr="C:\Claude\MCG Full Stack\generators\assets\icons\predict.png">    </p:cNvPr>
+          <p:cNvPr id="16" name="Image 1" descr="C:\Claude\MCG Full Stack\generators\assets\icons\predict.png">    </p:cNvPr>
           <p:cNvPicPr>
             <a:picLocks noChangeAspect="1"/>
           </p:cNvPicPr>
@@ -2850,7 +2850,7 @@
       </p:pic>
       <p:sp>
         <p:nvSpPr>
-          <p:cNvPr id="16" name="Text 12"/>
+          <p:cNvPr id="17" name="Text 12"/>
           <p:cNvSpPr/>
           <p:nvPr/>
         </p:nvSpPr>
@@ -2892,7 +2892,7 @@
       </p:sp>
       <p:sp>
         <p:nvSpPr>
-          <p:cNvPr id="17" name="Text 13"/>
+          <p:cNvPr id="18" name="Text 13"/>
           <p:cNvSpPr/>
           <p:nvPr/>
         </p:nvSpPr>
@@ -2934,7 +2934,7 @@
       </p:sp>
       <p:sp>
         <p:nvSpPr>
-          <p:cNvPr id="18" name="Text 14"/>
+          <p:cNvPr id="19" name="Text 14"/>
           <p:cNvSpPr/>
           <p:nvPr/>
         </p:nvSpPr>
@@ -2976,7 +2976,7 @@
       </p:sp>
       <p:sp>
         <p:nvSpPr>
-          <p:cNvPr id="19" name="Text 15"/>
+          <p:cNvPr id="20" name="Text 15"/>
           <p:cNvSpPr/>
           <p:nvPr/>
         </p:nvSpPr>
@@ -3018,7 +3018,7 @@
       </p:sp>
       <p:sp>
         <p:nvSpPr>
-          <p:cNvPr id="20" name="Shape 16"/>
+          <p:cNvPr id="21" name="Shape 16"/>
           <p:cNvSpPr/>
           <p:nvPr/>
         </p:nvSpPr>
@@ -3045,7 +3045,7 @@
       </p:sp>
       <p:sp>
         <p:nvSpPr>
-          <p:cNvPr id="21" name="Shape 17"/>
+          <p:cNvPr id="22" name="Shape 17"/>
           <p:cNvSpPr/>
           <p:nvPr/>
         </p:nvSpPr>
@@ -3067,7 +3067,7 @@
       </p:sp>
       <p:sp>
         <p:nvSpPr>
-          <p:cNvPr id="22" name="Text 18"/>
+          <p:cNvPr id="23" name="Text 18"/>
           <p:cNvSpPr/>
           <p:nvPr/>
         </p:nvSpPr>
@@ -3106,7 +3106,7 @@
       </p:sp>
       <p:sp>
         <p:nvSpPr>
-          <p:cNvPr id="23" name="Shape 19"/>
+          <p:cNvPr id="24" name="Shape 19"/>
           <p:cNvSpPr/>
           <p:nvPr/>
         </p:nvSpPr>
@@ -3138,7 +3138,7 @@
       </p:sp>
       <p:pic>
         <p:nvPicPr>
-          <p:cNvPr id="24" name="Image 2" descr="C:\Claude\MCG Full Stack\generators\assets\icons\agent.png">    </p:cNvPr>
+          <p:cNvPr id="25" name="Image 2" descr="C:\Claude\MCG Full Stack\generators\assets\icons\agent.png">    </p:cNvPr>
           <p:cNvPicPr>
             <a:picLocks noChangeAspect="1"/>
           </p:cNvPicPr>
@@ -3162,7 +3162,7 @@
       </p:pic>
       <p:sp>
         <p:nvSpPr>
-          <p:cNvPr id="25" name="Text 20"/>
+          <p:cNvPr id="26" name="Text 20"/>
           <p:cNvSpPr/>
           <p:nvPr/>
         </p:nvSpPr>
@@ -3204,7 +3204,7 @@
       </p:sp>
       <p:sp>
         <p:nvSpPr>
-          <p:cNvPr id="26" name="Text 21"/>
+          <p:cNvPr id="27" name="Text 21"/>
           <p:cNvSpPr/>
           <p:nvPr/>
         </p:nvSpPr>
@@ -3246,7 +3246,7 @@
       </p:sp>
       <p:sp>
         <p:nvSpPr>
-          <p:cNvPr id="27" name="Text 22"/>
+          <p:cNvPr id="28" name="Text 22"/>
           <p:cNvSpPr/>
           <p:nvPr/>
         </p:nvSpPr>
@@ -3288,7 +3288,7 @@
       </p:sp>
       <p:sp>
         <p:nvSpPr>
-          <p:cNvPr id="28" name="Text 23"/>
+          <p:cNvPr id="29" name="Text 23"/>
           <p:cNvSpPr/>
           <p:nvPr/>
         </p:nvSpPr>
@@ -3330,7 +3330,7 @@
       </p:sp>
       <p:sp>
         <p:nvSpPr>
-          <p:cNvPr id="29" name="Shape 24"/>
+          <p:cNvPr id="30" name="Shape 24"/>
           <p:cNvSpPr/>
           <p:nvPr/>
         </p:nvSpPr>
@@ -3352,7 +3352,7 @@
       </p:sp>
       <p:sp>
         <p:nvSpPr>
-          <p:cNvPr id="30" name="Text 25"/>
+          <p:cNvPr id="31" name="Text 25"/>
           <p:cNvSpPr/>
           <p:nvPr/>
         </p:nvSpPr>
@@ -3478,7 +3478,7 @@
         <p:spPr>
           <a:xfrm>
             <a:off x="457200" y="6492240"/>
-            <a:ext cx="640080" cy="274320"/>
+            <a:ext cx="493776" cy="274320"/>
           </a:xfrm>
           <a:prstGeom prst="rect">
             <a:avLst/>
@@ -3604,7 +3604,7 @@
       </p:sp>
       <p:sp>
         <p:nvSpPr>
-          <p:cNvPr id="8" name="Text 5"/>
+          <p:cNvPr id="9" name="Text 5"/>
           <p:cNvSpPr/>
           <p:nvPr/>
         </p:nvSpPr>
@@ -3643,7 +3643,7 @@
       </p:sp>
       <p:sp>
         <p:nvSpPr>
-          <p:cNvPr id="9" name="Shape 6"/>
+          <p:cNvPr id="10" name="Shape 6"/>
           <p:cNvSpPr/>
           <p:nvPr/>
         </p:nvSpPr>
@@ -3672,7 +3672,7 @@
       </p:sp>
       <p:sp>
         <p:nvSpPr>
-          <p:cNvPr id="10" name="Text 7"/>
+          <p:cNvPr id="11" name="Text 7"/>
           <p:cNvSpPr/>
           <p:nvPr/>
         </p:nvSpPr>
@@ -3711,7 +3711,7 @@
       </p:sp>
       <p:sp>
         <p:nvSpPr>
-          <p:cNvPr id="11" name="Text 8"/>
+          <p:cNvPr id="12" name="Text 8"/>
           <p:cNvSpPr/>
           <p:nvPr/>
         </p:nvSpPr>
@@ -3750,7 +3750,7 @@
       </p:sp>
       <p:sp>
         <p:nvSpPr>
-          <p:cNvPr id="12" name="Shape 9"/>
+          <p:cNvPr id="13" name="Shape 9"/>
           <p:cNvSpPr/>
           <p:nvPr/>
         </p:nvSpPr>
@@ -3777,7 +3777,7 @@
       </p:sp>
       <p:sp>
         <p:nvSpPr>
-          <p:cNvPr id="13" name="Shape 10"/>
+          <p:cNvPr id="14" name="Shape 10"/>
           <p:cNvSpPr/>
           <p:nvPr/>
         </p:nvSpPr>
@@ -3809,7 +3809,7 @@
       </p:sp>
       <p:pic>
         <p:nvPicPr>
-          <p:cNvPr id="14" name="Image 1" descr="C:\Claude\MCG Full Stack\generators\assets\icons\gateway.png">    </p:cNvPr>
+          <p:cNvPr id="15" name="Image 1" descr="C:\Claude\MCG Full Stack\generators\assets\icons\gateway.png">    </p:cNvPr>
           <p:cNvPicPr>
             <a:picLocks noChangeAspect="1"/>
           </p:cNvPicPr>
@@ -3833,7 +3833,7 @@
       </p:pic>
       <p:sp>
         <p:nvSpPr>
-          <p:cNvPr id="15" name="Text 11"/>
+          <p:cNvPr id="16" name="Text 11"/>
           <p:cNvSpPr/>
           <p:nvPr/>
         </p:nvSpPr>
@@ -3872,7 +3872,7 @@
       </p:sp>
       <p:sp>
         <p:nvSpPr>
-          <p:cNvPr id="16" name="Text 12"/>
+          <p:cNvPr id="17" name="Text 12"/>
           <p:cNvSpPr/>
           <p:nvPr/>
         </p:nvSpPr>
@@ -3914,7 +3914,7 @@
       </p:sp>
       <p:sp>
         <p:nvSpPr>
-          <p:cNvPr id="17" name="Shape 13"/>
+          <p:cNvPr id="18" name="Shape 13"/>
           <p:cNvSpPr/>
           <p:nvPr/>
         </p:nvSpPr>
@@ -3941,7 +3941,7 @@
       </p:sp>
       <p:sp>
         <p:nvSpPr>
-          <p:cNvPr id="18" name="Shape 14"/>
+          <p:cNvPr id="19" name="Shape 14"/>
           <p:cNvSpPr/>
           <p:nvPr/>
         </p:nvSpPr>
@@ -3973,7 +3973,7 @@
       </p:sp>
       <p:pic>
         <p:nvPicPr>
-          <p:cNvPr id="19" name="Image 2" descr="C:\Claude\MCG Full Stack\generators\assets\icons\governance.png">    </p:cNvPr>
+          <p:cNvPr id="20" name="Image 2" descr="C:\Claude\MCG Full Stack\generators\assets\icons\governance.png">    </p:cNvPr>
           <p:cNvPicPr>
             <a:picLocks noChangeAspect="1"/>
           </p:cNvPicPr>
@@ -3997,7 +3997,7 @@
       </p:pic>
       <p:sp>
         <p:nvSpPr>
-          <p:cNvPr id="20" name="Text 15"/>
+          <p:cNvPr id="21" name="Text 15"/>
           <p:cNvSpPr/>
           <p:nvPr/>
         </p:nvSpPr>
@@ -4036,7 +4036,7 @@
       </p:sp>
       <p:sp>
         <p:nvSpPr>
-          <p:cNvPr id="21" name="Text 16"/>
+          <p:cNvPr id="22" name="Text 16"/>
           <p:cNvSpPr/>
           <p:nvPr/>
         </p:nvSpPr>
@@ -4078,7 +4078,7 @@
       </p:sp>
       <p:sp>
         <p:nvSpPr>
-          <p:cNvPr id="22" name="Shape 17"/>
+          <p:cNvPr id="23" name="Shape 17"/>
           <p:cNvSpPr/>
           <p:nvPr/>
         </p:nvSpPr>
@@ -4105,7 +4105,7 @@
       </p:sp>
       <p:sp>
         <p:nvSpPr>
-          <p:cNvPr id="23" name="Shape 18"/>
+          <p:cNvPr id="24" name="Shape 18"/>
           <p:cNvSpPr/>
           <p:nvPr/>
         </p:nvSpPr>
@@ -4137,7 +4137,7 @@
       </p:sp>
       <p:pic>
         <p:nvPicPr>
-          <p:cNvPr id="24" name="Image 3" descr="C:\Claude\MCG Full Stack\generators\assets\icons\pipeline.png">    </p:cNvPr>
+          <p:cNvPr id="25" name="Image 3" descr="C:\Claude\MCG Full Stack\generators\assets\icons\pipeline.png">    </p:cNvPr>
           <p:cNvPicPr>
             <a:picLocks noChangeAspect="1"/>
           </p:cNvPicPr>
@@ -4161,7 +4161,7 @@
       </p:pic>
       <p:sp>
         <p:nvSpPr>
-          <p:cNvPr id="25" name="Text 19"/>
+          <p:cNvPr id="26" name="Text 19"/>
           <p:cNvSpPr/>
           <p:nvPr/>
         </p:nvSpPr>
@@ -4200,7 +4200,7 @@
       </p:sp>
       <p:sp>
         <p:nvSpPr>
-          <p:cNvPr id="26" name="Text 20"/>
+          <p:cNvPr id="27" name="Text 20"/>
           <p:cNvSpPr/>
           <p:nvPr/>
         </p:nvSpPr>
@@ -4242,7 +4242,7 @@
       </p:sp>
       <p:sp>
         <p:nvSpPr>
-          <p:cNvPr id="27" name="Shape 21"/>
+          <p:cNvPr id="28" name="Shape 21"/>
           <p:cNvSpPr/>
           <p:nvPr/>
         </p:nvSpPr>
@@ -4264,7 +4264,7 @@
       </p:sp>
       <p:sp>
         <p:nvSpPr>
-          <p:cNvPr id="28" name="Text 22"/>
+          <p:cNvPr id="29" name="Text 22"/>
           <p:cNvSpPr/>
           <p:nvPr/>
         </p:nvSpPr>
@@ -4390,7 +4390,7 @@
         <p:spPr>
           <a:xfrm>
             <a:off x="457200" y="6492240"/>
-            <a:ext cx="640080" cy="274320"/>
+            <a:ext cx="493776" cy="274320"/>
           </a:xfrm>
           <a:prstGeom prst="rect">
             <a:avLst/>
@@ -4516,7 +4516,7 @@
       </p:sp>
       <p:sp>
         <p:nvSpPr>
-          <p:cNvPr id="8" name="Text 5"/>
+          <p:cNvPr id="9" name="Text 5"/>
           <p:cNvSpPr/>
           <p:nvPr/>
         </p:nvSpPr>
@@ -4555,7 +4555,7 @@
       </p:sp>
       <p:sp>
         <p:nvSpPr>
-          <p:cNvPr id="9" name="Shape 6"/>
+          <p:cNvPr id="10" name="Shape 6"/>
           <p:cNvSpPr/>
           <p:nvPr/>
         </p:nvSpPr>
@@ -4582,7 +4582,7 @@
       </p:sp>
       <p:sp>
         <p:nvSpPr>
-          <p:cNvPr id="10" name="Shape 7"/>
+          <p:cNvPr id="11" name="Shape 7"/>
           <p:cNvSpPr/>
           <p:nvPr/>
         </p:nvSpPr>
@@ -4602,7 +4602,7 @@
       </p:sp>
       <p:sp>
         <p:nvSpPr>
-          <p:cNvPr id="11" name="Text 8"/>
+          <p:cNvPr id="12" name="Text 8"/>
           <p:cNvSpPr/>
           <p:nvPr/>
         </p:nvSpPr>
@@ -4633,7 +4633,7 @@
                 <a:ea typeface="Inter" pitchFamily="34" charset="-122"/>
                 <a:cs typeface="Inter" pitchFamily="34" charset="-120"/>
               </a:rPr>
-              <a:t>6</a:t>
+              <a:t>3</a:t>
             </a:r>
             <a:endParaRPr lang="en-US" sz="4400" dirty="0"/>
           </a:p>
@@ -4641,7 +4641,7 @@
       </p:sp>
       <p:sp>
         <p:nvSpPr>
-          <p:cNvPr id="12" name="Text 9"/>
+          <p:cNvPr id="13" name="Text 9"/>
           <p:cNvSpPr/>
           <p:nvPr/>
         </p:nvSpPr>
@@ -4683,7 +4683,7 @@
       </p:sp>
       <p:sp>
         <p:nvSpPr>
-          <p:cNvPr id="13" name="Shape 10"/>
+          <p:cNvPr id="14" name="Shape 10"/>
           <p:cNvSpPr/>
           <p:nvPr/>
         </p:nvSpPr>
@@ -4710,7 +4710,7 @@
       </p:sp>
       <p:sp>
         <p:nvSpPr>
-          <p:cNvPr id="14" name="Shape 11"/>
+          <p:cNvPr id="15" name="Shape 11"/>
           <p:cNvSpPr/>
           <p:nvPr/>
         </p:nvSpPr>
@@ -4730,7 +4730,7 @@
       </p:sp>
       <p:sp>
         <p:nvSpPr>
-          <p:cNvPr id="15" name="Text 12"/>
+          <p:cNvPr id="16" name="Text 12"/>
           <p:cNvSpPr/>
           <p:nvPr/>
         </p:nvSpPr>
@@ -4769,7 +4769,7 @@
       </p:sp>
       <p:sp>
         <p:nvSpPr>
-          <p:cNvPr id="16" name="Text 13"/>
+          <p:cNvPr id="17" name="Text 13"/>
           <p:cNvSpPr/>
           <p:nvPr/>
         </p:nvSpPr>
@@ -4811,7 +4811,7 @@
       </p:sp>
       <p:sp>
         <p:nvSpPr>
-          <p:cNvPr id="17" name="Shape 14"/>
+          <p:cNvPr id="18" name="Shape 14"/>
           <p:cNvSpPr/>
           <p:nvPr/>
         </p:nvSpPr>
@@ -4838,7 +4838,7 @@
       </p:sp>
       <p:sp>
         <p:nvSpPr>
-          <p:cNvPr id="18" name="Shape 15"/>
+          <p:cNvPr id="19" name="Shape 15"/>
           <p:cNvSpPr/>
           <p:nvPr/>
         </p:nvSpPr>
@@ -4858,7 +4858,7 @@
       </p:sp>
       <p:sp>
         <p:nvSpPr>
-          <p:cNvPr id="19" name="Text 16"/>
+          <p:cNvPr id="20" name="Text 16"/>
           <p:cNvSpPr/>
           <p:nvPr/>
         </p:nvSpPr>
@@ -4897,7 +4897,7 @@
       </p:sp>
       <p:sp>
         <p:nvSpPr>
-          <p:cNvPr id="20" name="Text 17"/>
+          <p:cNvPr id="21" name="Text 17"/>
           <p:cNvSpPr/>
           <p:nvPr/>
         </p:nvSpPr>
@@ -4939,7 +4939,7 @@
       </p:sp>
       <p:sp>
         <p:nvSpPr>
-          <p:cNvPr id="21" name="Shape 18"/>
+          <p:cNvPr id="22" name="Shape 18"/>
           <p:cNvSpPr/>
           <p:nvPr/>
         </p:nvSpPr>
@@ -4966,7 +4966,7 @@
       </p:sp>
       <p:sp>
         <p:nvSpPr>
-          <p:cNvPr id="22" name="Shape 19"/>
+          <p:cNvPr id="23" name="Shape 19"/>
           <p:cNvSpPr/>
           <p:nvPr/>
         </p:nvSpPr>
@@ -4986,7 +4986,7 @@
       </p:sp>
       <p:sp>
         <p:nvSpPr>
-          <p:cNvPr id="23" name="Text 20"/>
+          <p:cNvPr id="24" name="Text 20"/>
           <p:cNvSpPr/>
           <p:nvPr/>
         </p:nvSpPr>
@@ -5025,7 +5025,7 @@
       </p:sp>
       <p:sp>
         <p:nvSpPr>
-          <p:cNvPr id="24" name="Text 21"/>
+          <p:cNvPr id="25" name="Text 21"/>
           <p:cNvSpPr/>
           <p:nvPr/>
         </p:nvSpPr>
@@ -5067,7 +5067,7 @@
       </p:sp>
       <p:sp>
         <p:nvSpPr>
-          <p:cNvPr id="25" name="Shape 22"/>
+          <p:cNvPr id="26" name="Shape 22"/>
           <p:cNvSpPr/>
           <p:nvPr/>
         </p:nvSpPr>
@@ -5094,7 +5094,7 @@
       </p:sp>
       <p:sp>
         <p:nvSpPr>
-          <p:cNvPr id="26" name="Shape 23"/>
+          <p:cNvPr id="27" name="Shape 23"/>
           <p:cNvSpPr/>
           <p:nvPr/>
         </p:nvSpPr>
@@ -5114,7 +5114,7 @@
       </p:sp>
       <p:sp>
         <p:nvSpPr>
-          <p:cNvPr id="27" name="Text 24"/>
+          <p:cNvPr id="28" name="Text 24"/>
           <p:cNvSpPr/>
           <p:nvPr/>
         </p:nvSpPr>
@@ -5153,7 +5153,7 @@
       </p:sp>
       <p:sp>
         <p:nvSpPr>
-          <p:cNvPr id="28" name="Text 25"/>
+          <p:cNvPr id="29" name="Text 25"/>
           <p:cNvSpPr/>
           <p:nvPr/>
         </p:nvSpPr>
@@ -5195,7 +5195,7 @@
       </p:sp>
       <p:sp>
         <p:nvSpPr>
-          <p:cNvPr id="29" name="Shape 26"/>
+          <p:cNvPr id="30" name="Shape 26"/>
           <p:cNvSpPr/>
           <p:nvPr/>
         </p:nvSpPr>
@@ -5222,7 +5222,7 @@
       </p:sp>
       <p:sp>
         <p:nvSpPr>
-          <p:cNvPr id="30" name="Shape 27"/>
+          <p:cNvPr id="31" name="Shape 27"/>
           <p:cNvSpPr/>
           <p:nvPr/>
         </p:nvSpPr>
@@ -5242,7 +5242,7 @@
       </p:sp>
       <p:sp>
         <p:nvSpPr>
-          <p:cNvPr id="31" name="Text 28"/>
+          <p:cNvPr id="32" name="Text 28"/>
           <p:cNvSpPr/>
           <p:nvPr/>
         </p:nvSpPr>
@@ -5281,7 +5281,7 @@
       </p:sp>
       <p:sp>
         <p:nvSpPr>
-          <p:cNvPr id="32" name="Text 29"/>
+          <p:cNvPr id="33" name="Text 29"/>
           <p:cNvSpPr/>
           <p:nvPr/>
         </p:nvSpPr>
@@ -5323,7 +5323,7 @@
       </p:sp>
       <p:sp>
         <p:nvSpPr>
-          <p:cNvPr id="33" name="Shape 30"/>
+          <p:cNvPr id="34" name="Shape 30"/>
           <p:cNvSpPr/>
           <p:nvPr/>
         </p:nvSpPr>
@@ -5350,7 +5350,7 @@
       </p:sp>
       <p:sp>
         <p:nvSpPr>
-          <p:cNvPr id="34" name="Shape 31"/>
+          <p:cNvPr id="35" name="Shape 31"/>
           <p:cNvSpPr/>
           <p:nvPr/>
         </p:nvSpPr>
@@ -5370,7 +5370,7 @@
       </p:sp>
       <p:sp>
         <p:nvSpPr>
-          <p:cNvPr id="35" name="Text 32"/>
+          <p:cNvPr id="36" name="Text 32"/>
           <p:cNvSpPr/>
           <p:nvPr/>
         </p:nvSpPr>
@@ -5409,7 +5409,7 @@
       </p:sp>
       <p:sp>
         <p:nvSpPr>
-          <p:cNvPr id="36" name="Text 33"/>
+          <p:cNvPr id="37" name="Text 33"/>
           <p:cNvSpPr/>
           <p:nvPr/>
         </p:nvSpPr>
@@ -5451,7 +5451,7 @@
       </p:sp>
       <p:sp>
         <p:nvSpPr>
-          <p:cNvPr id="37" name="Shape 34"/>
+          <p:cNvPr id="38" name="Shape 34"/>
           <p:cNvSpPr/>
           <p:nvPr/>
         </p:nvSpPr>
@@ -5478,7 +5478,7 @@
       </p:sp>
       <p:sp>
         <p:nvSpPr>
-          <p:cNvPr id="38" name="Shape 35"/>
+          <p:cNvPr id="39" name="Shape 35"/>
           <p:cNvSpPr/>
           <p:nvPr/>
         </p:nvSpPr>
@@ -5498,7 +5498,7 @@
       </p:sp>
       <p:sp>
         <p:nvSpPr>
-          <p:cNvPr id="39" name="Text 36"/>
+          <p:cNvPr id="40" name="Text 36"/>
           <p:cNvSpPr/>
           <p:nvPr/>
         </p:nvSpPr>
@@ -5537,7 +5537,7 @@
       </p:sp>
       <p:sp>
         <p:nvSpPr>
-          <p:cNvPr id="40" name="Text 37"/>
+          <p:cNvPr id="41" name="Text 37"/>
           <p:cNvSpPr/>
           <p:nvPr/>
         </p:nvSpPr>
@@ -5579,7 +5579,7 @@
       </p:sp>
       <p:sp>
         <p:nvSpPr>
-          <p:cNvPr id="41" name="Shape 38"/>
+          <p:cNvPr id="42" name="Shape 38"/>
           <p:cNvSpPr/>
           <p:nvPr/>
         </p:nvSpPr>
@@ -5606,7 +5606,7 @@
       </p:sp>
       <p:sp>
         <p:nvSpPr>
-          <p:cNvPr id="42" name="Shape 39"/>
+          <p:cNvPr id="43" name="Shape 39"/>
           <p:cNvSpPr/>
           <p:nvPr/>
         </p:nvSpPr>
@@ -5626,7 +5626,7 @@
       </p:sp>
       <p:sp>
         <p:nvSpPr>
-          <p:cNvPr id="43" name="Text 40"/>
+          <p:cNvPr id="44" name="Text 40"/>
           <p:cNvSpPr/>
           <p:nvPr/>
         </p:nvSpPr>
@@ -5665,7 +5665,7 @@
       </p:sp>
       <p:sp>
         <p:nvSpPr>
-          <p:cNvPr id="44" name="Text 41"/>
+          <p:cNvPr id="45" name="Text 41"/>
           <p:cNvSpPr/>
           <p:nvPr/>
         </p:nvSpPr>
@@ -5707,7 +5707,7 @@
       </p:sp>
       <p:sp>
         <p:nvSpPr>
-          <p:cNvPr id="45" name="Shape 42"/>
+          <p:cNvPr id="46" name="Shape 42"/>
           <p:cNvSpPr/>
           <p:nvPr/>
         </p:nvSpPr>
@@ -5734,7 +5734,7 @@
       </p:sp>
       <p:sp>
         <p:nvSpPr>
-          <p:cNvPr id="46" name="Shape 43"/>
+          <p:cNvPr id="47" name="Shape 43"/>
           <p:cNvSpPr/>
           <p:nvPr/>
         </p:nvSpPr>
@@ -5754,7 +5754,7 @@
       </p:sp>
       <p:sp>
         <p:nvSpPr>
-          <p:cNvPr id="47" name="Text 44"/>
+          <p:cNvPr id="48" name="Text 44"/>
           <p:cNvSpPr/>
           <p:nvPr/>
         </p:nvSpPr>
@@ -5793,7 +5793,7 @@
       </p:sp>
       <p:sp>
         <p:nvSpPr>
-          <p:cNvPr id="48" name="Text 45"/>
+          <p:cNvPr id="49" name="Text 45"/>
           <p:cNvSpPr/>
           <p:nvPr/>
         </p:nvSpPr>
@@ -5835,7 +5835,7 @@
       </p:sp>
       <p:sp>
         <p:nvSpPr>
-          <p:cNvPr id="49" name="Shape 46"/>
+          <p:cNvPr id="50" name="Shape 46"/>
           <p:cNvSpPr/>
           <p:nvPr/>
         </p:nvSpPr>
@@ -5857,7 +5857,7 @@
       </p:sp>
       <p:sp>
         <p:nvSpPr>
-          <p:cNvPr id="50" name="Text 47"/>
+          <p:cNvPr id="51" name="Text 47"/>
           <p:cNvSpPr/>
           <p:nvPr/>
         </p:nvSpPr>
@@ -5967,7 +5967,7 @@
         <p:spPr>
           <a:xfrm>
             <a:off x="457200" y="365760"/>
-            <a:ext cx="1280160" cy="566928"/>
+            <a:ext cx="1024128" cy="566928"/>
           </a:xfrm>
           <a:prstGeom prst="rect">
             <a:avLst/>
@@ -6054,7 +6054,7 @@
       </p:sp>
       <p:sp>
         <p:nvSpPr>
-          <p:cNvPr id="6" name="Text 2"/>
+          <p:cNvPr id="7" name="Text 2"/>
           <p:cNvSpPr/>
           <p:nvPr/>
         </p:nvSpPr>
@@ -6093,7 +6093,7 @@
       </p:sp>
       <p:sp>
         <p:nvSpPr>
-          <p:cNvPr id="7" name="Text 3"/>
+          <p:cNvPr id="8" name="Text 3"/>
           <p:cNvSpPr/>
           <p:nvPr/>
         </p:nvSpPr>
@@ -6124,7 +6124,7 @@
                 <a:ea typeface="Inter" pitchFamily="34" charset="-122"/>
                 <a:cs typeface="Inter" pitchFamily="34" charset="-120"/>
               </a:rPr>
-              <a:t>Qlik + Clarity: from 7 data-quality nightmares to a trusted, AI-ready platform.</a:t>
+              <a:t>Qlik + Clarity: a repeatable framework for demoing the full Qlik Cloud stack, end to end.</a:t>
             </a:r>
             <a:endParaRPr lang="en-US" sz="1300" dirty="0"/>
           </a:p>
@@ -6132,7 +6132,7 @@
       </p:sp>
       <p:sp>
         <p:nvSpPr>
-          <p:cNvPr id="8" name="Shape 4"/>
+          <p:cNvPr id="9" name="Shape 4"/>
           <p:cNvSpPr/>
           <p:nvPr/>
         </p:nvSpPr>
@@ -6159,7 +6159,7 @@
       </p:sp>
       <p:sp>
         <p:nvSpPr>
-          <p:cNvPr id="9" name="Text 5"/>
+          <p:cNvPr id="10" name="Text 5"/>
           <p:cNvSpPr/>
           <p:nvPr/>
         </p:nvSpPr>
@@ -6198,7 +6198,7 @@
       </p:sp>
       <p:sp>
         <p:nvSpPr>
-          <p:cNvPr id="10" name="Text 6"/>
+          <p:cNvPr id="11" name="Text 6"/>
           <p:cNvSpPr/>
           <p:nvPr/>
         </p:nvSpPr>
@@ -6237,7 +6237,7 @@
       </p:sp>
       <p:sp>
         <p:nvSpPr>
-          <p:cNvPr id="11" name="Shape 7"/>
+          <p:cNvPr id="12" name="Shape 7"/>
           <p:cNvSpPr/>
           <p:nvPr/>
         </p:nvSpPr>
@@ -6264,7 +6264,7 @@
       </p:sp>
       <p:sp>
         <p:nvSpPr>
-          <p:cNvPr id="12" name="Text 8"/>
+          <p:cNvPr id="13" name="Text 8"/>
           <p:cNvSpPr/>
           <p:nvPr/>
         </p:nvSpPr>
@@ -6295,7 +6295,7 @@
                 <a:ea typeface="Inter" pitchFamily="34" charset="-122"/>
                 <a:cs typeface="Inter" pitchFamily="34" charset="-120"/>
               </a:rPr>
-              <a:t>6</a:t>
+              <a:t>3</a:t>
             </a:r>
             <a:endParaRPr lang="en-US" sz="2800" dirty="0"/>
           </a:p>
@@ -6303,7 +6303,7 @@
       </p:sp>
       <p:sp>
         <p:nvSpPr>
-          <p:cNvPr id="13" name="Text 9"/>
+          <p:cNvPr id="14" name="Text 9"/>
           <p:cNvSpPr/>
           <p:nvPr/>
         </p:nvSpPr>
@@ -6342,7 +6342,7 @@
       </p:sp>
       <p:sp>
         <p:nvSpPr>
-          <p:cNvPr id="14" name="Shape 10"/>
+          <p:cNvPr id="15" name="Shape 10"/>
           <p:cNvSpPr/>
           <p:nvPr/>
         </p:nvSpPr>
@@ -6369,7 +6369,7 @@
       </p:sp>
       <p:sp>
         <p:nvSpPr>
-          <p:cNvPr id="15" name="Text 11"/>
+          <p:cNvPr id="16" name="Text 11"/>
           <p:cNvSpPr/>
           <p:nvPr/>
         </p:nvSpPr>
@@ -6408,7 +6408,7 @@
       </p:sp>
       <p:sp>
         <p:nvSpPr>
-          <p:cNvPr id="16" name="Text 12"/>
+          <p:cNvPr id="17" name="Text 12"/>
           <p:cNvSpPr/>
           <p:nvPr/>
         </p:nvSpPr>
@@ -6447,7 +6447,7 @@
       </p:sp>
       <p:sp>
         <p:nvSpPr>
-          <p:cNvPr id="17" name="Shape 13"/>
+          <p:cNvPr id="18" name="Shape 13"/>
           <p:cNvSpPr/>
           <p:nvPr/>
         </p:nvSpPr>
@@ -6474,7 +6474,7 @@
       </p:sp>
       <p:sp>
         <p:nvSpPr>
-          <p:cNvPr id="18" name="Text 14"/>
+          <p:cNvPr id="19" name="Text 14"/>
           <p:cNvSpPr/>
           <p:nvPr/>
         </p:nvSpPr>
@@ -6513,7 +6513,7 @@
       </p:sp>
       <p:sp>
         <p:nvSpPr>
-          <p:cNvPr id="19" name="Text 15"/>
+          <p:cNvPr id="20" name="Text 15"/>
           <p:cNvSpPr/>
           <p:nvPr/>
         </p:nvSpPr>
@@ -6552,7 +6552,7 @@
       </p:sp>
       <p:sp>
         <p:nvSpPr>
-          <p:cNvPr id="20" name="Text 16"/>
+          <p:cNvPr id="21" name="Text 16"/>
           <p:cNvSpPr/>
           <p:nvPr/>
         </p:nvSpPr>
@@ -6605,7 +6605,7 @@
       </p:sp>
       <p:sp>
         <p:nvSpPr>
-          <p:cNvPr id="21" name="Text 17"/>
+          <p:cNvPr id="22" name="Text 17"/>
           <p:cNvSpPr/>
           <p:nvPr/>
         </p:nvSpPr>
@@ -6745,7 +6745,7 @@
         <p:spPr>
           <a:xfrm>
             <a:off x="457200" y="6492240"/>
-            <a:ext cx="640080" cy="274320"/>
+            <a:ext cx="493776" cy="274320"/>
           </a:xfrm>
           <a:prstGeom prst="rect">
             <a:avLst/>
@@ -6871,7 +6871,7 @@
       </p:sp>
       <p:sp>
         <p:nvSpPr>
-          <p:cNvPr id="8" name="Text 5"/>
+          <p:cNvPr id="9" name="Text 5"/>
           <p:cNvSpPr/>
           <p:nvPr/>
         </p:nvSpPr>
@@ -6902,7 +6902,7 @@
                 <a:ea typeface="Inter" pitchFamily="34" charset="-122"/>
                 <a:cs typeface="Inter" pitchFamily="34" charset="-120"/>
               </a:rPr>
-              <a:t>The initiative in plain terms — one fictional retailer, one messy estate, one unified Qlik platform</a:t>
+              <a:t>The initiative in plain terms — a repeatable framework for demoing the full Qlik Cloud stack, end to end</a:t>
             </a:r>
             <a:endParaRPr lang="en-US" sz="1300" dirty="0"/>
           </a:p>
@@ -6910,7 +6910,7 @@
       </p:sp>
       <p:sp>
         <p:nvSpPr>
-          <p:cNvPr id="9" name="Shape 6"/>
+          <p:cNvPr id="10" name="Shape 6"/>
           <p:cNvSpPr/>
           <p:nvPr/>
         </p:nvSpPr>
@@ -6937,7 +6937,7 @@
       </p:sp>
       <p:sp>
         <p:nvSpPr>
-          <p:cNvPr id="10" name="Text 7"/>
+          <p:cNvPr id="11" name="Text 7"/>
           <p:cNvSpPr/>
           <p:nvPr/>
         </p:nvSpPr>
@@ -6990,7 +6990,7 @@
       </p:sp>
       <p:sp>
         <p:nvSpPr>
-          <p:cNvPr id="11" name="Text 8"/>
+          <p:cNvPr id="12" name="Text 8"/>
           <p:cNvSpPr/>
           <p:nvPr/>
         </p:nvSpPr>
@@ -7021,7 +7021,7 @@
                 <a:ea typeface="Inter" pitchFamily="34" charset="-122"/>
                 <a:cs typeface="Inter" pitchFamily="34" charset="-120"/>
               </a:rPr>
-              <a:t>Turning a fragmented data mess into a single trusted, AI-ready Qlik data platform.</a:t>
+              <a:t>A repeatable framework for demoing how Qlik Cloud turns fragmented, messy data into trusted, AI-ready data products.</a:t>
             </a:r>
             <a:endParaRPr lang="en-US" sz="1300" dirty="0"/>
           </a:p>
@@ -7029,7 +7029,7 @@
       </p:sp>
       <p:sp>
         <p:nvSpPr>
-          <p:cNvPr id="12" name="Shape 9"/>
+          <p:cNvPr id="13" name="Shape 9"/>
           <p:cNvSpPr/>
           <p:nvPr/>
         </p:nvSpPr>
@@ -7056,7 +7056,7 @@
       </p:sp>
       <p:sp>
         <p:nvSpPr>
-          <p:cNvPr id="13" name="Shape 10"/>
+          <p:cNvPr id="14" name="Shape 10"/>
           <p:cNvSpPr/>
           <p:nvPr/>
         </p:nvSpPr>
@@ -7078,7 +7078,7 @@
       </p:sp>
       <p:sp>
         <p:nvSpPr>
-          <p:cNvPr id="14" name="Text 11"/>
+          <p:cNvPr id="15" name="Text 11"/>
           <p:cNvSpPr/>
           <p:nvPr/>
         </p:nvSpPr>
@@ -7117,7 +7117,7 @@
       </p:sp>
       <p:sp>
         <p:nvSpPr>
-          <p:cNvPr id="15" name="Shape 12"/>
+          <p:cNvPr id="16" name="Shape 12"/>
           <p:cNvSpPr/>
           <p:nvPr/>
         </p:nvSpPr>
@@ -7149,7 +7149,7 @@
       </p:sp>
       <p:pic>
         <p:nvPicPr>
-          <p:cNvPr id="16" name="Image 1" descr="C:\Claude\MCG Full Stack\generators\assets\icons\cloud.png">    </p:cNvPr>
+          <p:cNvPr id="17" name="Image 1" descr="C:\Claude\MCG Full Stack\generators\assets\icons\cloud.png">    </p:cNvPr>
           <p:cNvPicPr>
             <a:picLocks noChangeAspect="1"/>
           </p:cNvPicPr>
@@ -7173,7 +7173,7 @@
       </p:pic>
       <p:sp>
         <p:nvSpPr>
-          <p:cNvPr id="17" name="Text 13"/>
+          <p:cNvPr id="18" name="Text 13"/>
           <p:cNvSpPr/>
           <p:nvPr/>
         </p:nvSpPr>
@@ -7215,7 +7215,7 @@
       </p:sp>
       <p:sp>
         <p:nvSpPr>
-          <p:cNvPr id="18" name="Text 14"/>
+          <p:cNvPr id="19" name="Text 14"/>
           <p:cNvSpPr/>
           <p:nvPr/>
         </p:nvSpPr>
@@ -7257,7 +7257,7 @@
       </p:sp>
       <p:sp>
         <p:nvSpPr>
-          <p:cNvPr id="19" name="Text 15"/>
+          <p:cNvPr id="20" name="Text 15"/>
           <p:cNvSpPr/>
           <p:nvPr/>
         </p:nvSpPr>
@@ -7291,7 +7291,7 @@
                 <a:ea typeface="Inter" pitchFamily="34" charset="-122"/>
                 <a:cs typeface="Inter" pitchFamily="34" charset="-120"/>
               </a:rPr>
-              <a:t>▸  Project Qlarity is the transformation of that mess into one Qlik Cloud platform</a:t>
+              <a:t>▸  Project Qlarity is the framework for demoing that mess becoming trusted, governed Qlik data</a:t>
             </a:r>
             <a:endParaRPr lang="en-US" sz="1150" dirty="0"/>
           </a:p>
@@ -7299,7 +7299,7 @@
       </p:sp>
       <p:sp>
         <p:nvSpPr>
-          <p:cNvPr id="20" name="Text 16"/>
+          <p:cNvPr id="21" name="Text 16"/>
           <p:cNvSpPr/>
           <p:nvPr/>
         </p:nvSpPr>
@@ -7333,7 +7333,7 @@
                 <a:ea typeface="Inter" pitchFamily="34" charset="-122"/>
                 <a:cs typeface="Inter" pitchFamily="34" charset="-120"/>
               </a:rPr>
-              <a:t>▸  A complete, presentable end-to-end Qlik demo environment</a:t>
+              <a:t>▸  A complete, presentable end-to-end Qlik demo environment — a framework, not a product</a:t>
             </a:r>
             <a:endParaRPr lang="en-US" sz="1150" dirty="0"/>
           </a:p>
@@ -7341,7 +7341,7 @@
       </p:sp>
       <p:sp>
         <p:nvSpPr>
-          <p:cNvPr id="21" name="Shape 17"/>
+          <p:cNvPr id="22" name="Shape 17"/>
           <p:cNvSpPr/>
           <p:nvPr/>
         </p:nvSpPr>
@@ -7368,7 +7368,7 @@
       </p:sp>
       <p:sp>
         <p:nvSpPr>
-          <p:cNvPr id="22" name="Shape 18"/>
+          <p:cNvPr id="23" name="Shape 18"/>
           <p:cNvSpPr/>
           <p:nvPr/>
         </p:nvSpPr>
@@ -7390,7 +7390,7 @@
       </p:sp>
       <p:sp>
         <p:nvSpPr>
-          <p:cNvPr id="23" name="Text 19"/>
+          <p:cNvPr id="24" name="Text 19"/>
           <p:cNvSpPr/>
           <p:nvPr/>
         </p:nvSpPr>
@@ -7429,7 +7429,7 @@
       </p:sp>
       <p:sp>
         <p:nvSpPr>
-          <p:cNvPr id="24" name="Shape 20"/>
+          <p:cNvPr id="25" name="Shape 20"/>
           <p:cNvSpPr/>
           <p:nvPr/>
         </p:nvSpPr>
@@ -7461,7 +7461,7 @@
       </p:sp>
       <p:pic>
         <p:nvPicPr>
-          <p:cNvPr id="25" name="Image 2" descr="C:\Claude\MCG Full Stack\generators\assets\icons\gateway.png">    </p:cNvPr>
+          <p:cNvPr id="26" name="Image 2" descr="C:\Claude\MCG Full Stack\generators\assets\icons\gateway.png">    </p:cNvPr>
           <p:cNvPicPr>
             <a:picLocks noChangeAspect="1"/>
           </p:cNvPicPr>
@@ -7485,7 +7485,7 @@
       </p:pic>
       <p:sp>
         <p:nvSpPr>
-          <p:cNvPr id="26" name="Text 21"/>
+          <p:cNvPr id="27" name="Text 21"/>
           <p:cNvSpPr/>
           <p:nvPr/>
         </p:nvSpPr>
@@ -7527,7 +7527,7 @@
       </p:sp>
       <p:sp>
         <p:nvSpPr>
-          <p:cNvPr id="27" name="Text 22"/>
+          <p:cNvPr id="28" name="Text 22"/>
           <p:cNvSpPr/>
           <p:nvPr/>
         </p:nvSpPr>
@@ -7569,7 +7569,7 @@
       </p:sp>
       <p:sp>
         <p:nvSpPr>
-          <p:cNvPr id="28" name="Text 23"/>
+          <p:cNvPr id="29" name="Text 23"/>
           <p:cNvSpPr/>
           <p:nvPr/>
         </p:nvSpPr>
@@ -7611,7 +7611,7 @@
       </p:sp>
       <p:sp>
         <p:nvSpPr>
-          <p:cNvPr id="29" name="Text 24"/>
+          <p:cNvPr id="30" name="Text 24"/>
           <p:cNvSpPr/>
           <p:nvPr/>
         </p:nvSpPr>
@@ -7653,7 +7653,7 @@
       </p:sp>
       <p:sp>
         <p:nvSpPr>
-          <p:cNvPr id="30" name="Shape 25"/>
+          <p:cNvPr id="31" name="Shape 25"/>
           <p:cNvSpPr/>
           <p:nvPr/>
         </p:nvSpPr>
@@ -7675,7 +7675,7 @@
       </p:sp>
       <p:sp>
         <p:nvSpPr>
-          <p:cNvPr id="31" name="Text 26"/>
+          <p:cNvPr id="32" name="Text 26"/>
           <p:cNvSpPr/>
           <p:nvPr/>
         </p:nvSpPr>
@@ -7801,7 +7801,7 @@
         <p:spPr>
           <a:xfrm>
             <a:off x="457200" y="6492240"/>
-            <a:ext cx="640080" cy="274320"/>
+            <a:ext cx="493776" cy="274320"/>
           </a:xfrm>
           <a:prstGeom prst="rect">
             <a:avLst/>
@@ -7927,7 +7927,7 @@
       </p:sp>
       <p:sp>
         <p:nvSpPr>
-          <p:cNvPr id="8" name="Text 5"/>
+          <p:cNvPr id="9" name="Text 5"/>
           <p:cNvSpPr/>
           <p:nvPr/>
         </p:nvSpPr>
@@ -7966,7 +7966,7 @@
       </p:sp>
       <p:sp>
         <p:nvSpPr>
-          <p:cNvPr id="9" name="Shape 6"/>
+          <p:cNvPr id="10" name="Shape 6"/>
           <p:cNvSpPr/>
           <p:nvPr/>
         </p:nvSpPr>
@@ -7993,7 +7993,7 @@
       </p:sp>
       <p:sp>
         <p:nvSpPr>
-          <p:cNvPr id="10" name="Text 7"/>
+          <p:cNvPr id="11" name="Text 7"/>
           <p:cNvSpPr/>
           <p:nvPr/>
         </p:nvSpPr>
@@ -8032,7 +8032,7 @@
       </p:sp>
       <p:sp>
         <p:nvSpPr>
-          <p:cNvPr id="11" name="Text 8"/>
+          <p:cNvPr id="12" name="Text 8"/>
           <p:cNvSpPr/>
           <p:nvPr/>
         </p:nvSpPr>
@@ -8071,7 +8071,7 @@
       </p:sp>
       <p:sp>
         <p:nvSpPr>
-          <p:cNvPr id="12" name="Text 9"/>
+          <p:cNvPr id="13" name="Text 9"/>
           <p:cNvSpPr/>
           <p:nvPr/>
         </p:nvSpPr>
@@ -8113,7 +8113,7 @@
       </p:sp>
       <p:sp>
         <p:nvSpPr>
-          <p:cNvPr id="13" name="Shape 10"/>
+          <p:cNvPr id="14" name="Shape 10"/>
           <p:cNvSpPr/>
           <p:nvPr/>
         </p:nvSpPr>
@@ -8140,7 +8140,7 @@
       </p:sp>
       <p:sp>
         <p:nvSpPr>
-          <p:cNvPr id="14" name="Text 11"/>
+          <p:cNvPr id="15" name="Text 11"/>
           <p:cNvSpPr/>
           <p:nvPr/>
         </p:nvSpPr>
@@ -8179,7 +8179,7 @@
       </p:sp>
       <p:sp>
         <p:nvSpPr>
-          <p:cNvPr id="15" name="Text 12"/>
+          <p:cNvPr id="16" name="Text 12"/>
           <p:cNvSpPr/>
           <p:nvPr/>
         </p:nvSpPr>
@@ -8218,7 +8218,7 @@
       </p:sp>
       <p:sp>
         <p:nvSpPr>
-          <p:cNvPr id="16" name="Text 13"/>
+          <p:cNvPr id="17" name="Text 13"/>
           <p:cNvSpPr/>
           <p:nvPr/>
         </p:nvSpPr>
@@ -8260,7 +8260,7 @@
       </p:sp>
       <p:sp>
         <p:nvSpPr>
-          <p:cNvPr id="17" name="Shape 14"/>
+          <p:cNvPr id="18" name="Shape 14"/>
           <p:cNvSpPr/>
           <p:nvPr/>
         </p:nvSpPr>
@@ -8287,7 +8287,7 @@
       </p:sp>
       <p:sp>
         <p:nvSpPr>
-          <p:cNvPr id="18" name="Text 15"/>
+          <p:cNvPr id="19" name="Text 15"/>
           <p:cNvSpPr/>
           <p:nvPr/>
         </p:nvSpPr>
@@ -8326,7 +8326,7 @@
       </p:sp>
       <p:sp>
         <p:nvSpPr>
-          <p:cNvPr id="19" name="Text 16"/>
+          <p:cNvPr id="20" name="Text 16"/>
           <p:cNvSpPr/>
           <p:nvPr/>
         </p:nvSpPr>
@@ -8365,7 +8365,7 @@
       </p:sp>
       <p:sp>
         <p:nvSpPr>
-          <p:cNvPr id="20" name="Text 17"/>
+          <p:cNvPr id="21" name="Text 17"/>
           <p:cNvSpPr/>
           <p:nvPr/>
         </p:nvSpPr>
@@ -8407,7 +8407,7 @@
       </p:sp>
       <p:sp>
         <p:nvSpPr>
-          <p:cNvPr id="21" name="Shape 18"/>
+          <p:cNvPr id="22" name="Shape 18"/>
           <p:cNvSpPr/>
           <p:nvPr/>
         </p:nvSpPr>
@@ -8429,7 +8429,7 @@
       </p:sp>
       <p:sp>
         <p:nvSpPr>
-          <p:cNvPr id="22" name="Text 19"/>
+          <p:cNvPr id="23" name="Text 19"/>
           <p:cNvSpPr/>
           <p:nvPr/>
         </p:nvSpPr>
@@ -8468,7 +8468,7 @@
       </p:sp>
       <p:sp>
         <p:nvSpPr>
-          <p:cNvPr id="23" name="Shape 20"/>
+          <p:cNvPr id="24" name="Shape 20"/>
           <p:cNvSpPr/>
           <p:nvPr/>
         </p:nvSpPr>
@@ -8490,7 +8490,7 @@
       </p:sp>
       <p:sp>
         <p:nvSpPr>
-          <p:cNvPr id="24" name="Text 21"/>
+          <p:cNvPr id="25" name="Text 21"/>
           <p:cNvSpPr/>
           <p:nvPr/>
         </p:nvSpPr>
@@ -8529,7 +8529,7 @@
       </p:sp>
       <p:sp>
         <p:nvSpPr>
-          <p:cNvPr id="25" name="Text 22"/>
+          <p:cNvPr id="26" name="Text 22"/>
           <p:cNvSpPr/>
           <p:nvPr/>
         </p:nvSpPr>
@@ -8563,7 +8563,7 @@
                 <a:ea typeface="Inter" pitchFamily="34" charset="-122"/>
                 <a:cs typeface="Inter" pitchFamily="34" charset="-120"/>
               </a:rPr>
-              <a:t>Consolidate 47 systems into one governed Qlik Cloud platform — so every downstream analytic, document, and AI answer stands on data the business can trust.</a:t>
+              <a:t>Show 47 systems consolidated into one governed Qlik Cloud environment — so every downstream analytic, document, and AI answer stands on data the business can trust.</a:t>
             </a:r>
             <a:endParaRPr lang="en-US" sz="1200" dirty="0"/>
           </a:p>
@@ -8658,7 +8658,7 @@
         <p:spPr>
           <a:xfrm>
             <a:off x="457200" y="6492240"/>
-            <a:ext cx="640080" cy="274320"/>
+            <a:ext cx="493776" cy="274320"/>
           </a:xfrm>
           <a:prstGeom prst="rect">
             <a:avLst/>
@@ -8784,7 +8784,7 @@
       </p:sp>
       <p:sp>
         <p:nvSpPr>
-          <p:cNvPr id="8" name="Text 5"/>
+          <p:cNvPr id="9" name="Text 5"/>
           <p:cNvSpPr/>
           <p:nvPr/>
         </p:nvSpPr>
@@ -8823,7 +8823,7 @@
       </p:sp>
       <p:sp>
         <p:nvSpPr>
-          <p:cNvPr id="9" name="Shape 6"/>
+          <p:cNvPr id="10" name="Shape 6"/>
           <p:cNvSpPr/>
           <p:nvPr/>
         </p:nvSpPr>
@@ -8850,7 +8850,7 @@
       </p:sp>
       <p:sp>
         <p:nvSpPr>
-          <p:cNvPr id="10" name="Shape 7"/>
+          <p:cNvPr id="11" name="Shape 7"/>
           <p:cNvSpPr/>
           <p:nvPr/>
         </p:nvSpPr>
@@ -8870,7 +8870,7 @@
       </p:sp>
       <p:sp>
         <p:nvSpPr>
-          <p:cNvPr id="11" name="Shape 8"/>
+          <p:cNvPr id="12" name="Shape 8"/>
           <p:cNvSpPr/>
           <p:nvPr/>
         </p:nvSpPr>
@@ -8902,7 +8902,7 @@
       </p:sp>
       <p:pic>
         <p:nvPicPr>
-          <p:cNvPr id="12" name="Image 1" descr="C:\Claude\MCG Full Stack\generators\assets\icons\gateway.png">    </p:cNvPr>
+          <p:cNvPr id="13" name="Image 1" descr="C:\Claude\MCG Full Stack\generators\assets\icons\gateway.png">    </p:cNvPr>
           <p:cNvPicPr>
             <a:picLocks noChangeAspect="1"/>
           </p:cNvPicPr>
@@ -8926,7 +8926,7 @@
       </p:pic>
       <p:sp>
         <p:nvSpPr>
-          <p:cNvPr id="13" name="Text 9"/>
+          <p:cNvPr id="14" name="Text 9"/>
           <p:cNvSpPr/>
           <p:nvPr/>
         </p:nvSpPr>
@@ -8965,7 +8965,7 @@
       </p:sp>
       <p:sp>
         <p:nvSpPr>
-          <p:cNvPr id="14" name="Text 10"/>
+          <p:cNvPr id="15" name="Text 10"/>
           <p:cNvSpPr/>
           <p:nvPr/>
         </p:nvSpPr>
@@ -9004,7 +9004,7 @@
       </p:sp>
       <p:sp>
         <p:nvSpPr>
-          <p:cNvPr id="15" name="Text 11"/>
+          <p:cNvPr id="16" name="Text 11"/>
           <p:cNvSpPr/>
           <p:nvPr/>
         </p:nvSpPr>
@@ -9046,7 +9046,7 @@
       </p:sp>
       <p:sp>
         <p:nvSpPr>
-          <p:cNvPr id="16" name="Shape 12"/>
+          <p:cNvPr id="17" name="Shape 12"/>
           <p:cNvSpPr/>
           <p:nvPr/>
         </p:nvSpPr>
@@ -9073,7 +9073,7 @@
       </p:sp>
       <p:sp>
         <p:nvSpPr>
-          <p:cNvPr id="17" name="Shape 13"/>
+          <p:cNvPr id="18" name="Shape 13"/>
           <p:cNvSpPr/>
           <p:nvPr/>
         </p:nvSpPr>
@@ -9093,7 +9093,7 @@
       </p:sp>
       <p:sp>
         <p:nvSpPr>
-          <p:cNvPr id="18" name="Shape 14"/>
+          <p:cNvPr id="19" name="Shape 14"/>
           <p:cNvSpPr/>
           <p:nvPr/>
         </p:nvSpPr>
@@ -9125,7 +9125,7 @@
       </p:sp>
       <p:pic>
         <p:nvPicPr>
-          <p:cNvPr id="19" name="Image 2" descr="C:\Claude\MCG Full Stack\generators\assets\icons\governance.png">    </p:cNvPr>
+          <p:cNvPr id="20" name="Image 2" descr="C:\Claude\MCG Full Stack\generators\assets\icons\governance.png">    </p:cNvPr>
           <p:cNvPicPr>
             <a:picLocks noChangeAspect="1"/>
           </p:cNvPicPr>
@@ -9149,7 +9149,7 @@
       </p:pic>
       <p:sp>
         <p:nvSpPr>
-          <p:cNvPr id="20" name="Text 15"/>
+          <p:cNvPr id="21" name="Text 15"/>
           <p:cNvSpPr/>
           <p:nvPr/>
         </p:nvSpPr>
@@ -9188,7 +9188,7 @@
       </p:sp>
       <p:sp>
         <p:nvSpPr>
-          <p:cNvPr id="21" name="Text 16"/>
+          <p:cNvPr id="22" name="Text 16"/>
           <p:cNvSpPr/>
           <p:nvPr/>
         </p:nvSpPr>
@@ -9227,7 +9227,7 @@
       </p:sp>
       <p:sp>
         <p:nvSpPr>
-          <p:cNvPr id="22" name="Text 17"/>
+          <p:cNvPr id="23" name="Text 17"/>
           <p:cNvSpPr/>
           <p:nvPr/>
         </p:nvSpPr>
@@ -9269,7 +9269,7 @@
       </p:sp>
       <p:sp>
         <p:nvSpPr>
-          <p:cNvPr id="23" name="Shape 18"/>
+          <p:cNvPr id="24" name="Shape 18"/>
           <p:cNvSpPr/>
           <p:nvPr/>
         </p:nvSpPr>
@@ -9296,7 +9296,7 @@
       </p:sp>
       <p:sp>
         <p:nvSpPr>
-          <p:cNvPr id="24" name="Shape 19"/>
+          <p:cNvPr id="25" name="Shape 19"/>
           <p:cNvSpPr/>
           <p:nvPr/>
         </p:nvSpPr>
@@ -9316,7 +9316,7 @@
       </p:sp>
       <p:sp>
         <p:nvSpPr>
-          <p:cNvPr id="25" name="Shape 20"/>
+          <p:cNvPr id="26" name="Shape 20"/>
           <p:cNvSpPr/>
           <p:nvPr/>
         </p:nvSpPr>
@@ -9348,7 +9348,7 @@
       </p:sp>
       <p:pic>
         <p:nvPicPr>
-          <p:cNvPr id="26" name="Image 3" descr="C:\Claude\MCG Full Stack\generators\assets\icons\analytics.png">    </p:cNvPr>
+          <p:cNvPr id="27" name="Image 3" descr="C:\Claude\MCG Full Stack\generators\assets\icons\analytics.png">    </p:cNvPr>
           <p:cNvPicPr>
             <a:picLocks noChangeAspect="1"/>
           </p:cNvPicPr>
@@ -9372,7 +9372,7 @@
       </p:pic>
       <p:sp>
         <p:nvSpPr>
-          <p:cNvPr id="27" name="Text 21"/>
+          <p:cNvPr id="28" name="Text 21"/>
           <p:cNvSpPr/>
           <p:nvPr/>
         </p:nvSpPr>
@@ -9411,7 +9411,7 @@
       </p:sp>
       <p:sp>
         <p:nvSpPr>
-          <p:cNvPr id="28" name="Text 22"/>
+          <p:cNvPr id="29" name="Text 22"/>
           <p:cNvSpPr/>
           <p:nvPr/>
         </p:nvSpPr>
@@ -9450,7 +9450,7 @@
       </p:sp>
       <p:sp>
         <p:nvSpPr>
-          <p:cNvPr id="29" name="Text 23"/>
+          <p:cNvPr id="30" name="Text 23"/>
           <p:cNvSpPr/>
           <p:nvPr/>
         </p:nvSpPr>
@@ -9492,7 +9492,7 @@
       </p:sp>
       <p:sp>
         <p:nvSpPr>
-          <p:cNvPr id="30" name="Shape 24"/>
+          <p:cNvPr id="31" name="Shape 24"/>
           <p:cNvSpPr/>
           <p:nvPr/>
         </p:nvSpPr>
@@ -9519,7 +9519,7 @@
       </p:sp>
       <p:sp>
         <p:nvSpPr>
-          <p:cNvPr id="31" name="Shape 25"/>
+          <p:cNvPr id="32" name="Shape 25"/>
           <p:cNvSpPr/>
           <p:nvPr/>
         </p:nvSpPr>
@@ -9539,7 +9539,7 @@
       </p:sp>
       <p:sp>
         <p:nvSpPr>
-          <p:cNvPr id="32" name="Shape 26"/>
+          <p:cNvPr id="33" name="Shape 26"/>
           <p:cNvSpPr/>
           <p:nvPr/>
         </p:nvSpPr>
@@ -9571,7 +9571,7 @@
       </p:sp>
       <p:pic>
         <p:nvPicPr>
-          <p:cNvPr id="33" name="Image 4" descr="C:\Claude\MCG Full Stack\generators\assets\icons\predict.png">    </p:cNvPr>
+          <p:cNvPr id="34" name="Image 4" descr="C:\Claude\MCG Full Stack\generators\assets\icons\predict.png">    </p:cNvPr>
           <p:cNvPicPr>
             <a:picLocks noChangeAspect="1"/>
           </p:cNvPicPr>
@@ -9595,7 +9595,7 @@
       </p:pic>
       <p:sp>
         <p:nvSpPr>
-          <p:cNvPr id="34" name="Text 27"/>
+          <p:cNvPr id="35" name="Text 27"/>
           <p:cNvSpPr/>
           <p:nvPr/>
         </p:nvSpPr>
@@ -9634,7 +9634,7 @@
       </p:sp>
       <p:sp>
         <p:nvSpPr>
-          <p:cNvPr id="35" name="Text 28"/>
+          <p:cNvPr id="36" name="Text 28"/>
           <p:cNvSpPr/>
           <p:nvPr/>
         </p:nvSpPr>
@@ -9673,7 +9673,7 @@
       </p:sp>
       <p:sp>
         <p:nvSpPr>
-          <p:cNvPr id="36" name="Text 29"/>
+          <p:cNvPr id="37" name="Text 29"/>
           <p:cNvSpPr/>
           <p:nvPr/>
         </p:nvSpPr>
@@ -9802,7 +9802,7 @@
         <p:spPr>
           <a:xfrm>
             <a:off x="457200" y="6492240"/>
-            <a:ext cx="640080" cy="274320"/>
+            <a:ext cx="493776" cy="274320"/>
           </a:xfrm>
           <a:prstGeom prst="rect">
             <a:avLst/>
@@ -9928,7 +9928,7 @@
       </p:sp>
       <p:sp>
         <p:nvSpPr>
-          <p:cNvPr id="8" name="Text 5"/>
+          <p:cNvPr id="9" name="Text 5"/>
           <p:cNvSpPr/>
           <p:nvPr/>
         </p:nvSpPr>
@@ -9967,7 +9967,7 @@
       </p:sp>
       <p:sp>
         <p:nvSpPr>
-          <p:cNvPr id="9" name="Shape 6"/>
+          <p:cNvPr id="10" name="Shape 6"/>
           <p:cNvSpPr/>
           <p:nvPr/>
         </p:nvSpPr>
@@ -9994,7 +9994,7 @@
       </p:sp>
       <p:sp>
         <p:nvSpPr>
-          <p:cNvPr id="10" name="Text 7"/>
+          <p:cNvPr id="11" name="Text 7"/>
           <p:cNvSpPr/>
           <p:nvPr/>
         </p:nvSpPr>
@@ -10033,7 +10033,7 @@
       </p:sp>
       <p:sp>
         <p:nvSpPr>
-          <p:cNvPr id="11" name="Shape 8"/>
+          <p:cNvPr id="12" name="Shape 8"/>
           <p:cNvSpPr/>
           <p:nvPr/>
         </p:nvSpPr>
@@ -10060,7 +10060,7 @@
       </p:sp>
       <p:sp>
         <p:nvSpPr>
-          <p:cNvPr id="12" name="Shape 9"/>
+          <p:cNvPr id="13" name="Shape 9"/>
           <p:cNvSpPr/>
           <p:nvPr/>
         </p:nvSpPr>
@@ -10092,7 +10092,7 @@
       </p:sp>
       <p:pic>
         <p:nvPicPr>
-          <p:cNvPr id="13" name="Image 1" descr="C:\Claude\MCG Full Stack\generators\assets\icons\database.png">    </p:cNvPr>
+          <p:cNvPr id="14" name="Image 1" descr="C:\Claude\MCG Full Stack\generators\assets\icons\database.png">    </p:cNvPr>
           <p:cNvPicPr>
             <a:picLocks noChangeAspect="1"/>
           </p:cNvPicPr>
@@ -10116,7 +10116,7 @@
       </p:pic>
       <p:sp>
         <p:nvSpPr>
-          <p:cNvPr id="14" name="Text 10"/>
+          <p:cNvPr id="15" name="Text 10"/>
           <p:cNvSpPr/>
           <p:nvPr/>
         </p:nvSpPr>
@@ -10158,7 +10158,7 @@
       </p:sp>
       <p:sp>
         <p:nvSpPr>
-          <p:cNvPr id="15" name="Text 11"/>
+          <p:cNvPr id="16" name="Text 11"/>
           <p:cNvSpPr/>
           <p:nvPr/>
         </p:nvSpPr>
@@ -10197,7 +10197,7 @@
       </p:sp>
       <p:sp>
         <p:nvSpPr>
-          <p:cNvPr id="16" name="Shape 12"/>
+          <p:cNvPr id="17" name="Shape 12"/>
           <p:cNvSpPr/>
           <p:nvPr/>
         </p:nvSpPr>
@@ -10224,7 +10224,7 @@
       </p:sp>
       <p:sp>
         <p:nvSpPr>
-          <p:cNvPr id="17" name="Shape 13"/>
+          <p:cNvPr id="18" name="Shape 13"/>
           <p:cNvSpPr/>
           <p:nvPr/>
         </p:nvSpPr>
@@ -10256,7 +10256,7 @@
       </p:sp>
       <p:pic>
         <p:nvPicPr>
-          <p:cNvPr id="18" name="Image 2" descr="C:\Claude\MCG Full Stack\generators\assets\icons\stream.png">    </p:cNvPr>
+          <p:cNvPr id="19" name="Image 2" descr="C:\Claude\MCG Full Stack\generators\assets\icons\stream.png">    </p:cNvPr>
           <p:cNvPicPr>
             <a:picLocks noChangeAspect="1"/>
           </p:cNvPicPr>
@@ -10280,7 +10280,7 @@
       </p:pic>
       <p:sp>
         <p:nvSpPr>
-          <p:cNvPr id="19" name="Text 14"/>
+          <p:cNvPr id="20" name="Text 14"/>
           <p:cNvSpPr/>
           <p:nvPr/>
         </p:nvSpPr>
@@ -10322,7 +10322,7 @@
       </p:sp>
       <p:sp>
         <p:nvSpPr>
-          <p:cNvPr id="20" name="Text 15"/>
+          <p:cNvPr id="21" name="Text 15"/>
           <p:cNvSpPr/>
           <p:nvPr/>
         </p:nvSpPr>
@@ -10361,7 +10361,7 @@
       </p:sp>
       <p:sp>
         <p:nvSpPr>
-          <p:cNvPr id="21" name="Shape 16"/>
+          <p:cNvPr id="22" name="Shape 16"/>
           <p:cNvSpPr/>
           <p:nvPr/>
         </p:nvSpPr>
@@ -10388,7 +10388,7 @@
       </p:sp>
       <p:sp>
         <p:nvSpPr>
-          <p:cNvPr id="22" name="Shape 17"/>
+          <p:cNvPr id="23" name="Shape 17"/>
           <p:cNvSpPr/>
           <p:nvPr/>
         </p:nvSpPr>
@@ -10420,7 +10420,7 @@
       </p:sp>
       <p:pic>
         <p:nvPicPr>
-          <p:cNvPr id="23" name="Image 3" descr="C:\Claude\MCG Full Stack\generators\assets\icons\cloud.png">    </p:cNvPr>
+          <p:cNvPr id="24" name="Image 3" descr="C:\Claude\MCG Full Stack\generators\assets\icons\cloud.png">    </p:cNvPr>
           <p:cNvPicPr>
             <a:picLocks noChangeAspect="1"/>
           </p:cNvPicPr>
@@ -10444,7 +10444,7 @@
       </p:pic>
       <p:sp>
         <p:nvSpPr>
-          <p:cNvPr id="24" name="Text 18"/>
+          <p:cNvPr id="25" name="Text 18"/>
           <p:cNvSpPr/>
           <p:nvPr/>
         </p:nvSpPr>
@@ -10486,7 +10486,7 @@
       </p:sp>
       <p:sp>
         <p:nvSpPr>
-          <p:cNvPr id="25" name="Text 19"/>
+          <p:cNvPr id="26" name="Text 19"/>
           <p:cNvSpPr/>
           <p:nvPr/>
         </p:nvSpPr>
@@ -10525,7 +10525,7 @@
       </p:sp>
       <p:sp>
         <p:nvSpPr>
-          <p:cNvPr id="26" name="Text 20"/>
+          <p:cNvPr id="27" name="Text 20"/>
           <p:cNvSpPr/>
           <p:nvPr/>
         </p:nvSpPr>
@@ -10561,7 +10561,7 @@
       </p:sp>
       <p:sp>
         <p:nvSpPr>
-          <p:cNvPr id="27" name="Shape 21"/>
+          <p:cNvPr id="28" name="Shape 21"/>
           <p:cNvSpPr/>
           <p:nvPr/>
         </p:nvSpPr>
@@ -10588,7 +10588,7 @@
       </p:sp>
       <p:sp>
         <p:nvSpPr>
-          <p:cNvPr id="28" name="Shape 22"/>
+          <p:cNvPr id="29" name="Shape 22"/>
           <p:cNvSpPr/>
           <p:nvPr/>
         </p:nvSpPr>
@@ -10620,7 +10620,7 @@
       </p:sp>
       <p:pic>
         <p:nvPicPr>
-          <p:cNvPr id="29" name="Image 4" descr="C:\Claude\MCG Full Stack\generators\assets\icons\lakehouse.png">    </p:cNvPr>
+          <p:cNvPr id="30" name="Image 4" descr="C:\Claude\MCG Full Stack\generators\assets\icons\lakehouse.png">    </p:cNvPr>
           <p:cNvPicPr>
             <a:picLocks noChangeAspect="1"/>
           </p:cNvPicPr>
@@ -10644,7 +10644,7 @@
       </p:pic>
       <p:sp>
         <p:nvSpPr>
-          <p:cNvPr id="30" name="Text 23"/>
+          <p:cNvPr id="31" name="Text 23"/>
           <p:cNvSpPr/>
           <p:nvPr/>
         </p:nvSpPr>
@@ -10683,7 +10683,7 @@
       </p:sp>
       <p:sp>
         <p:nvSpPr>
-          <p:cNvPr id="31" name="Text 24"/>
+          <p:cNvPr id="32" name="Text 24"/>
           <p:cNvSpPr/>
           <p:nvPr/>
         </p:nvSpPr>
@@ -10722,7 +10722,7 @@
       </p:sp>
       <p:sp>
         <p:nvSpPr>
-          <p:cNvPr id="32" name="Shape 25"/>
+          <p:cNvPr id="33" name="Shape 25"/>
           <p:cNvSpPr/>
           <p:nvPr/>
         </p:nvSpPr>
@@ -10749,7 +10749,7 @@
       </p:sp>
       <p:sp>
         <p:nvSpPr>
-          <p:cNvPr id="33" name="Text 26"/>
+          <p:cNvPr id="34" name="Text 26"/>
           <p:cNvSpPr/>
           <p:nvPr/>
         </p:nvSpPr>
@@ -10788,7 +10788,7 @@
       </p:sp>
       <p:sp>
         <p:nvSpPr>
-          <p:cNvPr id="34" name="Text 27"/>
+          <p:cNvPr id="35" name="Text 27"/>
           <p:cNvSpPr/>
           <p:nvPr/>
         </p:nvSpPr>
@@ -10827,7 +10827,7 @@
       </p:sp>
       <p:sp>
         <p:nvSpPr>
-          <p:cNvPr id="35" name="Shape 28"/>
+          <p:cNvPr id="36" name="Shape 28"/>
           <p:cNvSpPr/>
           <p:nvPr/>
         </p:nvSpPr>
@@ -10854,7 +10854,7 @@
       </p:sp>
       <p:sp>
         <p:nvSpPr>
-          <p:cNvPr id="36" name="Text 29"/>
+          <p:cNvPr id="37" name="Text 29"/>
           <p:cNvSpPr/>
           <p:nvPr/>
         </p:nvSpPr>
@@ -10893,7 +10893,7 @@
       </p:sp>
       <p:sp>
         <p:nvSpPr>
-          <p:cNvPr id="37" name="Text 30"/>
+          <p:cNvPr id="38" name="Text 30"/>
           <p:cNvSpPr/>
           <p:nvPr/>
         </p:nvSpPr>
@@ -10932,7 +10932,7 @@
       </p:sp>
       <p:sp>
         <p:nvSpPr>
-          <p:cNvPr id="38" name="Shape 31"/>
+          <p:cNvPr id="39" name="Shape 31"/>
           <p:cNvSpPr/>
           <p:nvPr/>
         </p:nvSpPr>
@@ -10959,7 +10959,7 @@
       </p:sp>
       <p:sp>
         <p:nvSpPr>
-          <p:cNvPr id="39" name="Text 32"/>
+          <p:cNvPr id="40" name="Text 32"/>
           <p:cNvSpPr/>
           <p:nvPr/>
         </p:nvSpPr>
@@ -10998,7 +10998,7 @@
       </p:sp>
       <p:sp>
         <p:nvSpPr>
-          <p:cNvPr id="40" name="Text 33"/>
+          <p:cNvPr id="41" name="Text 33"/>
           <p:cNvSpPr/>
           <p:nvPr/>
         </p:nvSpPr>
@@ -11037,7 +11037,7 @@
       </p:sp>
       <p:sp>
         <p:nvSpPr>
-          <p:cNvPr id="41" name="Text 34"/>
+          <p:cNvPr id="42" name="Text 34"/>
           <p:cNvSpPr/>
           <p:nvPr/>
         </p:nvSpPr>
@@ -11073,7 +11073,7 @@
       </p:sp>
       <p:sp>
         <p:nvSpPr>
-          <p:cNvPr id="42" name="Shape 35"/>
+          <p:cNvPr id="43" name="Shape 35"/>
           <p:cNvSpPr/>
           <p:nvPr/>
         </p:nvSpPr>
@@ -11100,7 +11100,7 @@
       </p:sp>
       <p:sp>
         <p:nvSpPr>
-          <p:cNvPr id="43" name="Text 36"/>
+          <p:cNvPr id="44" name="Text 36"/>
           <p:cNvSpPr/>
           <p:nvPr/>
         </p:nvSpPr>
@@ -11139,7 +11139,7 @@
       </p:sp>
       <p:sp>
         <p:nvSpPr>
-          <p:cNvPr id="44" name="Shape 37"/>
+          <p:cNvPr id="45" name="Shape 37"/>
           <p:cNvSpPr/>
           <p:nvPr/>
         </p:nvSpPr>
@@ -11166,7 +11166,7 @@
       </p:sp>
       <p:sp>
         <p:nvSpPr>
-          <p:cNvPr id="45" name="Shape 38"/>
+          <p:cNvPr id="46" name="Shape 38"/>
           <p:cNvSpPr/>
           <p:nvPr/>
         </p:nvSpPr>
@@ -11198,7 +11198,7 @@
       </p:sp>
       <p:pic>
         <p:nvPicPr>
-          <p:cNvPr id="46" name="Image 5" descr="C:\Claude\MCG Full Stack\generators\assets\icons\analytics.png">    </p:cNvPr>
+          <p:cNvPr id="47" name="Image 5" descr="C:\Claude\MCG Full Stack\generators\assets\icons\analytics.png">    </p:cNvPr>
           <p:cNvPicPr>
             <a:picLocks noChangeAspect="1"/>
           </p:cNvPicPr>
@@ -11222,7 +11222,7 @@
       </p:pic>
       <p:sp>
         <p:nvSpPr>
-          <p:cNvPr id="47" name="Text 39"/>
+          <p:cNvPr id="48" name="Text 39"/>
           <p:cNvSpPr/>
           <p:nvPr/>
         </p:nvSpPr>
@@ -11261,7 +11261,7 @@
       </p:sp>
       <p:sp>
         <p:nvSpPr>
-          <p:cNvPr id="48" name="Text 40"/>
+          <p:cNvPr id="49" name="Text 40"/>
           <p:cNvSpPr/>
           <p:nvPr/>
         </p:nvSpPr>
@@ -11300,7 +11300,7 @@
       </p:sp>
       <p:sp>
         <p:nvSpPr>
-          <p:cNvPr id="49" name="Shape 41"/>
+          <p:cNvPr id="50" name="Shape 41"/>
           <p:cNvSpPr/>
           <p:nvPr/>
         </p:nvSpPr>
@@ -11327,7 +11327,7 @@
       </p:sp>
       <p:sp>
         <p:nvSpPr>
-          <p:cNvPr id="50" name="Shape 42"/>
+          <p:cNvPr id="51" name="Shape 42"/>
           <p:cNvSpPr/>
           <p:nvPr/>
         </p:nvSpPr>
@@ -11359,7 +11359,7 @@
       </p:sp>
       <p:pic>
         <p:nvPicPr>
-          <p:cNvPr id="51" name="Image 6" descr="C:\Claude\MCG Full Stack\generators\assets\icons\analytics.png">    </p:cNvPr>
+          <p:cNvPr id="52" name="Image 6" descr="C:\Claude\MCG Full Stack\generators\assets\icons\analytics.png">    </p:cNvPr>
           <p:cNvPicPr>
             <a:picLocks noChangeAspect="1"/>
           </p:cNvPicPr>
@@ -11383,7 +11383,7 @@
       </p:pic>
       <p:sp>
         <p:nvSpPr>
-          <p:cNvPr id="52" name="Text 43"/>
+          <p:cNvPr id="53" name="Text 43"/>
           <p:cNvSpPr/>
           <p:nvPr/>
         </p:nvSpPr>
@@ -11422,7 +11422,7 @@
       </p:sp>
       <p:sp>
         <p:nvSpPr>
-          <p:cNvPr id="53" name="Text 44"/>
+          <p:cNvPr id="54" name="Text 44"/>
           <p:cNvSpPr/>
           <p:nvPr/>
         </p:nvSpPr>
@@ -11461,7 +11461,7 @@
       </p:sp>
       <p:sp>
         <p:nvSpPr>
-          <p:cNvPr id="54" name="Shape 45"/>
+          <p:cNvPr id="55" name="Shape 45"/>
           <p:cNvSpPr/>
           <p:nvPr/>
         </p:nvSpPr>
@@ -11488,7 +11488,7 @@
       </p:sp>
       <p:sp>
         <p:nvSpPr>
-          <p:cNvPr id="55" name="Shape 46"/>
+          <p:cNvPr id="56" name="Shape 46"/>
           <p:cNvSpPr/>
           <p:nvPr/>
         </p:nvSpPr>
@@ -11520,7 +11520,7 @@
       </p:sp>
       <p:pic>
         <p:nvPicPr>
-          <p:cNvPr id="56" name="Image 7" descr="C:\Claude\MCG Full Stack\generators\assets\icons\predict.png">    </p:cNvPr>
+          <p:cNvPr id="57" name="Image 7" descr="C:\Claude\MCG Full Stack\generators\assets\icons\predict.png">    </p:cNvPr>
           <p:cNvPicPr>
             <a:picLocks noChangeAspect="1"/>
           </p:cNvPicPr>
@@ -11544,7 +11544,7 @@
       </p:pic>
       <p:sp>
         <p:nvSpPr>
-          <p:cNvPr id="57" name="Text 47"/>
+          <p:cNvPr id="58" name="Text 47"/>
           <p:cNvSpPr/>
           <p:nvPr/>
         </p:nvSpPr>
@@ -11583,7 +11583,7 @@
       </p:sp>
       <p:sp>
         <p:nvSpPr>
-          <p:cNvPr id="58" name="Text 48"/>
+          <p:cNvPr id="59" name="Text 48"/>
           <p:cNvSpPr/>
           <p:nvPr/>
         </p:nvSpPr>
@@ -11622,7 +11622,7 @@
       </p:sp>
       <p:sp>
         <p:nvSpPr>
-          <p:cNvPr id="59" name="Shape 49"/>
+          <p:cNvPr id="60" name="Shape 49"/>
           <p:cNvSpPr/>
           <p:nvPr/>
         </p:nvSpPr>
@@ -11649,7 +11649,7 @@
       </p:sp>
       <p:sp>
         <p:nvSpPr>
-          <p:cNvPr id="60" name="Shape 50"/>
+          <p:cNvPr id="61" name="Shape 50"/>
           <p:cNvSpPr/>
           <p:nvPr/>
         </p:nvSpPr>
@@ -11681,7 +11681,7 @@
       </p:sp>
       <p:pic>
         <p:nvPicPr>
-          <p:cNvPr id="61" name="Image 8" descr="C:\Claude\MCG Full Stack\generators\assets\icons\answers.png">    </p:cNvPr>
+          <p:cNvPr id="62" name="Image 8" descr="C:\Claude\MCG Full Stack\generators\assets\icons\answers.png">    </p:cNvPr>
           <p:cNvPicPr>
             <a:picLocks noChangeAspect="1"/>
           </p:cNvPicPr>
@@ -11705,7 +11705,7 @@
       </p:pic>
       <p:sp>
         <p:nvSpPr>
-          <p:cNvPr id="62" name="Text 51"/>
+          <p:cNvPr id="63" name="Text 51"/>
           <p:cNvSpPr/>
           <p:nvPr/>
         </p:nvSpPr>
@@ -11744,7 +11744,7 @@
       </p:sp>
       <p:sp>
         <p:nvSpPr>
-          <p:cNvPr id="63" name="Text 52"/>
+          <p:cNvPr id="64" name="Text 52"/>
           <p:cNvSpPr/>
           <p:nvPr/>
         </p:nvSpPr>
@@ -11783,7 +11783,7 @@
       </p:sp>
       <p:sp>
         <p:nvSpPr>
-          <p:cNvPr id="64" name="Shape 53"/>
+          <p:cNvPr id="65" name="Shape 53"/>
           <p:cNvSpPr/>
           <p:nvPr/>
         </p:nvSpPr>
@@ -11805,7 +11805,7 @@
       </p:sp>
       <p:sp>
         <p:nvSpPr>
-          <p:cNvPr id="65" name="Text 54"/>
+          <p:cNvPr id="66" name="Text 54"/>
           <p:cNvSpPr/>
           <p:nvPr/>
         </p:nvSpPr>
@@ -11931,7 +11931,7 @@
         <p:spPr>
           <a:xfrm>
             <a:off x="457200" y="6492240"/>
-            <a:ext cx="640080" cy="274320"/>
+            <a:ext cx="493776" cy="274320"/>
           </a:xfrm>
           <a:prstGeom prst="rect">
             <a:avLst/>
@@ -12057,7 +12057,7 @@
       </p:sp>
       <p:sp>
         <p:nvSpPr>
-          <p:cNvPr id="8" name="Text 5"/>
+          <p:cNvPr id="9" name="Text 5"/>
           <p:cNvSpPr/>
           <p:nvPr/>
         </p:nvSpPr>
@@ -12096,7 +12096,7 @@
       </p:sp>
       <p:sp>
         <p:nvSpPr>
-          <p:cNvPr id="9" name="Shape 6"/>
+          <p:cNvPr id="10" name="Shape 6"/>
           <p:cNvSpPr/>
           <p:nvPr/>
         </p:nvSpPr>
@@ -12123,7 +12123,7 @@
       </p:sp>
       <p:sp>
         <p:nvSpPr>
-          <p:cNvPr id="10" name="Shape 7"/>
+          <p:cNvPr id="11" name="Shape 7"/>
           <p:cNvSpPr/>
           <p:nvPr/>
         </p:nvSpPr>
@@ -12145,7 +12145,7 @@
       </p:sp>
       <p:sp>
         <p:nvSpPr>
-          <p:cNvPr id="11" name="Text 8"/>
+          <p:cNvPr id="12" name="Text 8"/>
           <p:cNvSpPr/>
           <p:nvPr/>
         </p:nvSpPr>
@@ -12176,7 +12176,7 @@
                 <a:ea typeface="Inter" pitchFamily="34" charset="-122"/>
                 <a:cs typeface="Inter" pitchFamily="34" charset="-120"/>
               </a:rPr>
-              <a:t>6 PowerPoint decks</a:t>
+              <a:t>3 PowerPoint decks</a:t>
             </a:r>
             <a:endParaRPr lang="en-US" sz="1400" dirty="0"/>
           </a:p>
@@ -12184,7 +12184,7 @@
       </p:sp>
       <p:sp>
         <p:nvSpPr>
-          <p:cNvPr id="12" name="Shape 9"/>
+          <p:cNvPr id="13" name="Shape 9"/>
           <p:cNvSpPr/>
           <p:nvPr/>
         </p:nvSpPr>
@@ -12216,7 +12216,7 @@
       </p:sp>
       <p:pic>
         <p:nvPicPr>
-          <p:cNvPr id="13" name="Image 1" descr="C:\Claude\MCG Full Stack\generators\assets\icons\answers.png">    </p:cNvPr>
+          <p:cNvPr id="14" name="Image 1" descr="C:\Claude\MCG Full Stack\generators\assets\icons\answers.png">    </p:cNvPr>
           <p:cNvPicPr>
             <a:picLocks noChangeAspect="1"/>
           </p:cNvPicPr>
@@ -12240,7 +12240,7 @@
       </p:pic>
       <p:sp>
         <p:nvSpPr>
-          <p:cNvPr id="14" name="Text 10"/>
+          <p:cNvPr id="15" name="Text 10"/>
           <p:cNvSpPr/>
           <p:nvPr/>
         </p:nvSpPr>
@@ -12282,7 +12282,7 @@
       </p:sp>
       <p:sp>
         <p:nvSpPr>
-          <p:cNvPr id="15" name="Text 11"/>
+          <p:cNvPr id="16" name="Text 11"/>
           <p:cNvSpPr/>
           <p:nvPr/>
         </p:nvSpPr>
@@ -12324,7 +12324,7 @@
       </p:sp>
       <p:sp>
         <p:nvSpPr>
-          <p:cNvPr id="16" name="Text 12"/>
+          <p:cNvPr id="17" name="Text 12"/>
           <p:cNvSpPr/>
           <p:nvPr/>
         </p:nvSpPr>
@@ -12366,133 +12366,7 @@
       </p:sp>
       <p:sp>
         <p:nvSpPr>
-          <p:cNvPr id="17" name="Text 13"/>
-          <p:cNvSpPr/>
-          <p:nvPr/>
-        </p:nvSpPr>
-        <p:spPr>
-          <a:xfrm>
-            <a:off x="713232" y="3803904"/>
-            <a:ext cx="5074920" cy="502920"/>
-          </a:xfrm>
-          <a:prstGeom prst="rect">
-            <a:avLst/>
-          </a:prstGeom>
-          <a:noFill/>
-          <a:ln/>
-        </p:spPr>
-        <p:txBody>
-          <a:bodyPr wrap="square" rtlCol="0" anchor="ctr"/>
-          <a:lstStyle/>
-          <a:p>
-            <a:pPr indent="0" marL="0">
-              <a:lnSpc>
-                <a:spcPct val="102000"/>
-              </a:lnSpc>
-              <a:buNone/>
-            </a:pPr>
-            <a:r>
-              <a:rPr lang="en-US" sz="1200" dirty="0">
-                <a:solidFill>
-                  <a:srgbClr val="454659"/>
-                </a:solidFill>
-                <a:latin typeface="Inter" pitchFamily="34" charset="0"/>
-                <a:ea typeface="Inter" pitchFamily="34" charset="-122"/>
-                <a:cs typeface="Inter" pitchFamily="34" charset="-120"/>
-              </a:rPr>
-              <a:t>▸  Agentic Data Engineering (16 slides)</a:t>
-            </a:r>
-            <a:endParaRPr lang="en-US" sz="1200" dirty="0"/>
-          </a:p>
-        </p:txBody>
-      </p:sp>
-      <p:sp>
-        <p:nvSpPr>
-          <p:cNvPr id="18" name="Text 14"/>
-          <p:cNvSpPr/>
-          <p:nvPr/>
-        </p:nvSpPr>
-        <p:spPr>
-          <a:xfrm>
-            <a:off x="713232" y="4407408"/>
-            <a:ext cx="5074920" cy="502920"/>
-          </a:xfrm>
-          <a:prstGeom prst="rect">
-            <a:avLst/>
-          </a:prstGeom>
-          <a:noFill/>
-          <a:ln/>
-        </p:spPr>
-        <p:txBody>
-          <a:bodyPr wrap="square" rtlCol="0" anchor="ctr"/>
-          <a:lstStyle/>
-          <a:p>
-            <a:pPr indent="0" marL="0">
-              <a:lnSpc>
-                <a:spcPct val="102000"/>
-              </a:lnSpc>
-              <a:buNone/>
-            </a:pPr>
-            <a:r>
-              <a:rPr lang="en-US" sz="1200" dirty="0">
-                <a:solidFill>
-                  <a:srgbClr val="454659"/>
-                </a:solidFill>
-                <a:latin typeface="Inter" pitchFamily="34" charset="0"/>
-                <a:ea typeface="Inter" pitchFamily="34" charset="-122"/>
-                <a:cs typeface="Inter" pitchFamily="34" charset="-120"/>
-              </a:rPr>
-              <a:t>▸  Marketecture</a:t>
-            </a:r>
-            <a:endParaRPr lang="en-US" sz="1200" dirty="0"/>
-          </a:p>
-        </p:txBody>
-      </p:sp>
-      <p:sp>
-        <p:nvSpPr>
-          <p:cNvPr id="19" name="Text 15"/>
-          <p:cNvSpPr/>
-          <p:nvPr/>
-        </p:nvSpPr>
-        <p:spPr>
-          <a:xfrm>
-            <a:off x="713232" y="5010912"/>
-            <a:ext cx="5074920" cy="502920"/>
-          </a:xfrm>
-          <a:prstGeom prst="rect">
-            <a:avLst/>
-          </a:prstGeom>
-          <a:noFill/>
-          <a:ln/>
-        </p:spPr>
-        <p:txBody>
-          <a:bodyPr wrap="square" rtlCol="0" anchor="ctr"/>
-          <a:lstStyle/>
-          <a:p>
-            <a:pPr indent="0" marL="0">
-              <a:lnSpc>
-                <a:spcPct val="102000"/>
-              </a:lnSpc>
-              <a:buNone/>
-            </a:pPr>
-            <a:r>
-              <a:rPr lang="en-US" sz="1200" dirty="0">
-                <a:solidFill>
-                  <a:srgbClr val="454659"/>
-                </a:solidFill>
-                <a:latin typeface="Inter" pitchFamily="34" charset="0"/>
-                <a:ea typeface="Inter" pitchFamily="34" charset="-122"/>
-                <a:cs typeface="Inter" pitchFamily="34" charset="-120"/>
-              </a:rPr>
-              <a:t>▸  Agentic Marketecture</a:t>
-            </a:r>
-            <a:endParaRPr lang="en-US" sz="1200" dirty="0"/>
-          </a:p>
-        </p:txBody>
-      </p:sp>
-      <p:sp>
-        <p:nvSpPr>
-          <p:cNvPr id="20" name="Shape 16"/>
+          <p:cNvPr id="18" name="Shape 13"/>
           <p:cNvSpPr/>
           <p:nvPr/>
         </p:nvSpPr>
@@ -12519,7 +12393,7 @@
       </p:sp>
       <p:sp>
         <p:nvSpPr>
-          <p:cNvPr id="21" name="Shape 17"/>
+          <p:cNvPr id="19" name="Shape 14"/>
           <p:cNvSpPr/>
           <p:nvPr/>
         </p:nvSpPr>
@@ -12541,7 +12415,7 @@
       </p:sp>
       <p:sp>
         <p:nvSpPr>
-          <p:cNvPr id="22" name="Text 18"/>
+          <p:cNvPr id="20" name="Text 15"/>
           <p:cNvSpPr/>
           <p:nvPr/>
         </p:nvSpPr>
@@ -12580,7 +12454,7 @@
       </p:sp>
       <p:sp>
         <p:nvSpPr>
-          <p:cNvPr id="23" name="Shape 19"/>
+          <p:cNvPr id="21" name="Shape 16"/>
           <p:cNvSpPr/>
           <p:nvPr/>
         </p:nvSpPr>
@@ -12612,7 +12486,7 @@
       </p:sp>
       <p:pic>
         <p:nvPicPr>
-          <p:cNvPr id="24" name="Image 2" descr="C:\Claude\MCG Full Stack\generators\assets\icons\governance.png">    </p:cNvPr>
+          <p:cNvPr id="22" name="Image 2" descr="C:\Claude\MCG Full Stack\generators\assets\icons\governance.png">    </p:cNvPr>
           <p:cNvPicPr>
             <a:picLocks noChangeAspect="1"/>
           </p:cNvPicPr>
@@ -12636,7 +12510,7 @@
       </p:pic>
       <p:sp>
         <p:nvSpPr>
-          <p:cNvPr id="25" name="Text 20"/>
+          <p:cNvPr id="23" name="Text 17"/>
           <p:cNvSpPr/>
           <p:nvPr/>
         </p:nvSpPr>
@@ -12678,7 +12552,7 @@
       </p:sp>
       <p:sp>
         <p:nvSpPr>
-          <p:cNvPr id="26" name="Text 21"/>
+          <p:cNvPr id="24" name="Text 18"/>
           <p:cNvSpPr/>
           <p:nvPr/>
         </p:nvSpPr>
@@ -12720,7 +12594,7 @@
       </p:sp>
       <p:sp>
         <p:nvSpPr>
-          <p:cNvPr id="27" name="Text 22"/>
+          <p:cNvPr id="25" name="Text 19"/>
           <p:cNvSpPr/>
           <p:nvPr/>
         </p:nvSpPr>
@@ -12762,7 +12636,7 @@
       </p:sp>
       <p:sp>
         <p:nvSpPr>
-          <p:cNvPr id="28" name="Text 23"/>
+          <p:cNvPr id="26" name="Text 20"/>
           <p:cNvSpPr/>
           <p:nvPr/>
         </p:nvSpPr>
@@ -12804,7 +12678,7 @@
       </p:sp>
       <p:sp>
         <p:nvSpPr>
-          <p:cNvPr id="29" name="Text 24"/>
+          <p:cNvPr id="27" name="Text 21"/>
           <p:cNvSpPr/>
           <p:nvPr/>
         </p:nvSpPr>
@@ -12846,7 +12720,7 @@
       </p:sp>
       <p:sp>
         <p:nvSpPr>
-          <p:cNvPr id="30" name="Shape 25"/>
+          <p:cNvPr id="28" name="Shape 22"/>
           <p:cNvSpPr/>
           <p:nvPr/>
         </p:nvSpPr>
@@ -12868,7 +12742,7 @@
       </p:sp>
       <p:sp>
         <p:nvSpPr>
-          <p:cNvPr id="31" name="Text 26"/>
+          <p:cNvPr id="29" name="Text 23"/>
           <p:cNvSpPr/>
           <p:nvPr/>
         </p:nvSpPr>
@@ -12994,7 +12868,7 @@
         <p:spPr>
           <a:xfrm>
             <a:off x="457200" y="6492240"/>
-            <a:ext cx="640080" cy="274320"/>
+            <a:ext cx="493776" cy="274320"/>
           </a:xfrm>
           <a:prstGeom prst="rect">
             <a:avLst/>
@@ -13120,7 +12994,7 @@
       </p:sp>
       <p:sp>
         <p:nvSpPr>
-          <p:cNvPr id="8" name="Text 5"/>
+          <p:cNvPr id="9" name="Text 5"/>
           <p:cNvSpPr/>
           <p:nvPr/>
         </p:nvSpPr>
@@ -13159,7 +13033,7 @@
       </p:sp>
       <p:sp>
         <p:nvSpPr>
-          <p:cNvPr id="9" name="Shape 6"/>
+          <p:cNvPr id="10" name="Shape 6"/>
           <p:cNvSpPr/>
           <p:nvPr/>
         </p:nvSpPr>
@@ -13186,7 +13060,7 @@
       </p:sp>
       <p:sp>
         <p:nvSpPr>
-          <p:cNvPr id="10" name="Shape 7"/>
+          <p:cNvPr id="11" name="Shape 7"/>
           <p:cNvSpPr/>
           <p:nvPr/>
         </p:nvSpPr>
@@ -13208,7 +13082,7 @@
       </p:sp>
       <p:sp>
         <p:nvSpPr>
-          <p:cNvPr id="11" name="Text 8"/>
+          <p:cNvPr id="12" name="Text 8"/>
           <p:cNvSpPr/>
           <p:nvPr/>
         </p:nvSpPr>
@@ -13247,7 +13121,7 @@
       </p:sp>
       <p:sp>
         <p:nvSpPr>
-          <p:cNvPr id="12" name="Shape 9"/>
+          <p:cNvPr id="13" name="Shape 9"/>
           <p:cNvSpPr/>
           <p:nvPr/>
         </p:nvSpPr>
@@ -13279,7 +13153,7 @@
       </p:sp>
       <p:pic>
         <p:nvPicPr>
-          <p:cNvPr id="13" name="Image 1" descr="C:\Claude\MCG Full Stack\generators\assets\icons\answers.png">    </p:cNvPr>
+          <p:cNvPr id="14" name="Image 1" descr="C:\Claude\MCG Full Stack\generators\assets\icons\answers.png">    </p:cNvPr>
           <p:cNvPicPr>
             <a:picLocks noChangeAspect="1"/>
           </p:cNvPicPr>
@@ -13303,7 +13177,7 @@
       </p:pic>
       <p:sp>
         <p:nvSpPr>
-          <p:cNvPr id="14" name="Text 10"/>
+          <p:cNvPr id="15" name="Text 10"/>
           <p:cNvSpPr/>
           <p:nvPr/>
         </p:nvSpPr>
@@ -13345,7 +13219,7 @@
       </p:sp>
       <p:sp>
         <p:nvSpPr>
-          <p:cNvPr id="15" name="Text 11"/>
+          <p:cNvPr id="16" name="Text 11"/>
           <p:cNvSpPr/>
           <p:nvPr/>
         </p:nvSpPr>
@@ -13387,7 +13261,7 @@
       </p:sp>
       <p:sp>
         <p:nvSpPr>
-          <p:cNvPr id="16" name="Text 12"/>
+          <p:cNvPr id="17" name="Text 12"/>
           <p:cNvSpPr/>
           <p:nvPr/>
         </p:nvSpPr>
@@ -13429,7 +13303,7 @@
       </p:sp>
       <p:sp>
         <p:nvSpPr>
-          <p:cNvPr id="17" name="Text 13"/>
+          <p:cNvPr id="18" name="Text 13"/>
           <p:cNvSpPr/>
           <p:nvPr/>
         </p:nvSpPr>
@@ -13471,7 +13345,7 @@
       </p:sp>
       <p:sp>
         <p:nvSpPr>
-          <p:cNvPr id="18" name="Text 14"/>
+          <p:cNvPr id="19" name="Text 14"/>
           <p:cNvSpPr/>
           <p:nvPr/>
         </p:nvSpPr>
@@ -13513,7 +13387,7 @@
       </p:sp>
       <p:sp>
         <p:nvSpPr>
-          <p:cNvPr id="19" name="Text 15"/>
+          <p:cNvPr id="20" name="Text 15"/>
           <p:cNvSpPr/>
           <p:nvPr/>
         </p:nvSpPr>
@@ -13555,7 +13429,7 @@
       </p:sp>
       <p:sp>
         <p:nvSpPr>
-          <p:cNvPr id="20" name="Shape 16"/>
+          <p:cNvPr id="21" name="Shape 16"/>
           <p:cNvSpPr/>
           <p:nvPr/>
         </p:nvSpPr>
@@ -13582,7 +13456,7 @@
       </p:sp>
       <p:sp>
         <p:nvSpPr>
-          <p:cNvPr id="21" name="Shape 17"/>
+          <p:cNvPr id="22" name="Shape 17"/>
           <p:cNvSpPr/>
           <p:nvPr/>
         </p:nvSpPr>
@@ -13604,7 +13478,7 @@
       </p:sp>
       <p:sp>
         <p:nvSpPr>
-          <p:cNvPr id="22" name="Text 18"/>
+          <p:cNvPr id="23" name="Text 18"/>
           <p:cNvSpPr/>
           <p:nvPr/>
         </p:nvSpPr>
@@ -13643,7 +13517,7 @@
       </p:sp>
       <p:sp>
         <p:nvSpPr>
-          <p:cNvPr id="23" name="Shape 19"/>
+          <p:cNvPr id="24" name="Shape 19"/>
           <p:cNvSpPr/>
           <p:nvPr/>
         </p:nvSpPr>
@@ -13675,7 +13549,7 @@
       </p:sp>
       <p:pic>
         <p:nvPicPr>
-          <p:cNvPr id="24" name="Image 2" descr="C:\Claude\MCG Full Stack\generators\assets\icons\governance.png">    </p:cNvPr>
+          <p:cNvPr id="25" name="Image 2" descr="C:\Claude\MCG Full Stack\generators\assets\icons\governance.png">    </p:cNvPr>
           <p:cNvPicPr>
             <a:picLocks noChangeAspect="1"/>
           </p:cNvPicPr>
@@ -13699,7 +13573,7 @@
       </p:pic>
       <p:sp>
         <p:nvSpPr>
-          <p:cNvPr id="25" name="Text 20"/>
+          <p:cNvPr id="26" name="Text 20"/>
           <p:cNvSpPr/>
           <p:nvPr/>
         </p:nvSpPr>
@@ -13741,7 +13615,7 @@
       </p:sp>
       <p:sp>
         <p:nvSpPr>
-          <p:cNvPr id="26" name="Text 21"/>
+          <p:cNvPr id="27" name="Text 21"/>
           <p:cNvSpPr/>
           <p:nvPr/>
         </p:nvSpPr>
@@ -13783,7 +13657,7 @@
       </p:sp>
       <p:sp>
         <p:nvSpPr>
-          <p:cNvPr id="27" name="Text 22"/>
+          <p:cNvPr id="28" name="Text 22"/>
           <p:cNvSpPr/>
           <p:nvPr/>
         </p:nvSpPr>
@@ -13825,7 +13699,7 @@
       </p:sp>
       <p:sp>
         <p:nvSpPr>
-          <p:cNvPr id="28" name="Text 23"/>
+          <p:cNvPr id="29" name="Text 23"/>
           <p:cNvSpPr/>
           <p:nvPr/>
         </p:nvSpPr>
@@ -13867,7 +13741,7 @@
       </p:sp>
       <p:sp>
         <p:nvSpPr>
-          <p:cNvPr id="29" name="Text 24"/>
+          <p:cNvPr id="30" name="Text 24"/>
           <p:cNvSpPr/>
           <p:nvPr/>
         </p:nvSpPr>
@@ -13909,7 +13783,7 @@
       </p:sp>
       <p:sp>
         <p:nvSpPr>
-          <p:cNvPr id="30" name="Shape 25"/>
+          <p:cNvPr id="31" name="Shape 25"/>
           <p:cNvSpPr/>
           <p:nvPr/>
         </p:nvSpPr>
@@ -13931,7 +13805,7 @@
       </p:sp>
       <p:sp>
         <p:nvSpPr>
-          <p:cNvPr id="31" name="Text 26"/>
+          <p:cNvPr id="32" name="Text 26"/>
           <p:cNvSpPr/>
           <p:nvPr/>
         </p:nvSpPr>
@@ -14057,7 +13931,7 @@
         <p:spPr>
           <a:xfrm>
             <a:off x="457200" y="6492240"/>
-            <a:ext cx="640080" cy="274320"/>
+            <a:ext cx="493776" cy="274320"/>
           </a:xfrm>
           <a:prstGeom prst="rect">
             <a:avLst/>
@@ -14183,7 +14057,7 @@
       </p:sp>
       <p:sp>
         <p:nvSpPr>
-          <p:cNvPr id="8" name="Shape 5"/>
+          <p:cNvPr id="9" name="Shape 5"/>
           <p:cNvSpPr/>
           <p:nvPr/>
         </p:nvSpPr>
@@ -14205,7 +14079,7 @@
       </p:sp>
       <p:sp>
         <p:nvSpPr>
-          <p:cNvPr id="9" name="Text 6"/>
+          <p:cNvPr id="10" name="Text 6"/>
           <p:cNvSpPr/>
           <p:nvPr/>
         </p:nvSpPr>
@@ -14244,7 +14118,7 @@
       </p:sp>
       <p:sp>
         <p:nvSpPr>
-          <p:cNvPr id="10" name="Text 7"/>
+          <p:cNvPr id="11" name="Text 7"/>
           <p:cNvSpPr/>
           <p:nvPr/>
         </p:nvSpPr>
@@ -14283,7 +14157,7 @@
       </p:sp>
       <p:sp>
         <p:nvSpPr>
-          <p:cNvPr id="11" name="Shape 8"/>
+          <p:cNvPr id="12" name="Shape 8"/>
           <p:cNvSpPr/>
           <p:nvPr/>
         </p:nvSpPr>
@@ -14310,7 +14184,7 @@
       </p:sp>
       <p:sp>
         <p:nvSpPr>
-          <p:cNvPr id="12" name="Shape 9"/>
+          <p:cNvPr id="13" name="Shape 9"/>
           <p:cNvSpPr/>
           <p:nvPr/>
         </p:nvSpPr>
@@ -14332,7 +14206,7 @@
       </p:sp>
       <p:sp>
         <p:nvSpPr>
-          <p:cNvPr id="13" name="Text 10"/>
+          <p:cNvPr id="14" name="Text 10"/>
           <p:cNvSpPr/>
           <p:nvPr/>
         </p:nvSpPr>
@@ -14371,7 +14245,7 @@
       </p:sp>
       <p:sp>
         <p:nvSpPr>
-          <p:cNvPr id="14" name="Shape 11"/>
+          <p:cNvPr id="15" name="Shape 11"/>
           <p:cNvSpPr/>
           <p:nvPr/>
         </p:nvSpPr>
@@ -14403,7 +14277,7 @@
       </p:sp>
       <p:pic>
         <p:nvPicPr>
-          <p:cNvPr id="15" name="Image 1" descr="C:\Claude\MCG Full Stack\generators\assets\icons\pipeline.png">    </p:cNvPr>
+          <p:cNvPr id="16" name="Image 1" descr="C:\Claude\MCG Full Stack\generators\assets\icons\pipeline.png">    </p:cNvPr>
           <p:cNvPicPr>
             <a:picLocks noChangeAspect="1"/>
           </p:cNvPicPr>
@@ -14427,7 +14301,7 @@
       </p:pic>
       <p:sp>
         <p:nvSpPr>
-          <p:cNvPr id="16" name="Text 12"/>
+          <p:cNvPr id="17" name="Text 12"/>
           <p:cNvSpPr/>
           <p:nvPr/>
         </p:nvSpPr>
@@ -14469,7 +14343,7 @@
       </p:sp>
       <p:sp>
         <p:nvSpPr>
-          <p:cNvPr id="17" name="Text 13"/>
+          <p:cNvPr id="18" name="Text 13"/>
           <p:cNvSpPr/>
           <p:nvPr/>
         </p:nvSpPr>
@@ -14511,7 +14385,7 @@
       </p:sp>
       <p:sp>
         <p:nvSpPr>
-          <p:cNvPr id="18" name="Text 14"/>
+          <p:cNvPr id="19" name="Text 14"/>
           <p:cNvSpPr/>
           <p:nvPr/>
         </p:nvSpPr>
@@ -14553,7 +14427,7 @@
       </p:sp>
       <p:sp>
         <p:nvSpPr>
-          <p:cNvPr id="19" name="Text 15"/>
+          <p:cNvPr id="20" name="Text 15"/>
           <p:cNvSpPr/>
           <p:nvPr/>
         </p:nvSpPr>
@@ -14595,7 +14469,7 @@
       </p:sp>
       <p:sp>
         <p:nvSpPr>
-          <p:cNvPr id="20" name="Text 16"/>
+          <p:cNvPr id="21" name="Text 16"/>
           <p:cNvSpPr/>
           <p:nvPr/>
         </p:nvSpPr>
@@ -14637,7 +14511,7 @@
       </p:sp>
       <p:sp>
         <p:nvSpPr>
-          <p:cNvPr id="21" name="Shape 17"/>
+          <p:cNvPr id="22" name="Shape 17"/>
           <p:cNvSpPr/>
           <p:nvPr/>
         </p:nvSpPr>
@@ -14664,7 +14538,7 @@
       </p:sp>
       <p:sp>
         <p:nvSpPr>
-          <p:cNvPr id="22" name="Shape 18"/>
+          <p:cNvPr id="23" name="Shape 18"/>
           <p:cNvSpPr/>
           <p:nvPr/>
         </p:nvSpPr>
@@ -14686,7 +14560,7 @@
       </p:sp>
       <p:sp>
         <p:nvSpPr>
-          <p:cNvPr id="23" name="Text 19"/>
+          <p:cNvPr id="24" name="Text 19"/>
           <p:cNvSpPr/>
           <p:nvPr/>
         </p:nvSpPr>
@@ -14725,7 +14599,7 @@
       </p:sp>
       <p:sp>
         <p:nvSpPr>
-          <p:cNvPr id="24" name="Shape 20"/>
+          <p:cNvPr id="25" name="Shape 20"/>
           <p:cNvSpPr/>
           <p:nvPr/>
         </p:nvSpPr>
@@ -14757,7 +14631,7 @@
       </p:sp>
       <p:pic>
         <p:nvPicPr>
-          <p:cNvPr id="25" name="Image 2" descr="C:\Claude\MCG Full Stack\generators\assets\icons\lakehouse.png">    </p:cNvPr>
+          <p:cNvPr id="26" name="Image 2" descr="C:\Claude\MCG Full Stack\generators\assets\icons\lakehouse.png">    </p:cNvPr>
           <p:cNvPicPr>
             <a:picLocks noChangeAspect="1"/>
           </p:cNvPicPr>
@@ -14781,7 +14655,7 @@
       </p:pic>
       <p:sp>
         <p:nvSpPr>
-          <p:cNvPr id="26" name="Text 21"/>
+          <p:cNvPr id="27" name="Text 21"/>
           <p:cNvSpPr/>
           <p:nvPr/>
         </p:nvSpPr>
@@ -14823,7 +14697,7 @@
       </p:sp>
       <p:sp>
         <p:nvSpPr>
-          <p:cNvPr id="27" name="Text 22"/>
+          <p:cNvPr id="28" name="Text 22"/>
           <p:cNvSpPr/>
           <p:nvPr/>
         </p:nvSpPr>
@@ -14865,7 +14739,7 @@
       </p:sp>
       <p:sp>
         <p:nvSpPr>
-          <p:cNvPr id="28" name="Text 23"/>
+          <p:cNvPr id="29" name="Text 23"/>
           <p:cNvSpPr/>
           <p:nvPr/>
         </p:nvSpPr>
@@ -14907,7 +14781,7 @@
       </p:sp>
       <p:sp>
         <p:nvSpPr>
-          <p:cNvPr id="29" name="Text 24"/>
+          <p:cNvPr id="30" name="Text 24"/>
           <p:cNvSpPr/>
           <p:nvPr/>
         </p:nvSpPr>
@@ -14949,7 +14823,7 @@
       </p:sp>
       <p:sp>
         <p:nvSpPr>
-          <p:cNvPr id="30" name="Text 25"/>
+          <p:cNvPr id="31" name="Text 25"/>
           <p:cNvSpPr/>
           <p:nvPr/>
         </p:nvSpPr>
@@ -14991,7 +14865,7 @@
       </p:sp>
       <p:sp>
         <p:nvSpPr>
-          <p:cNvPr id="31" name="Shape 26"/>
+          <p:cNvPr id="32" name="Shape 26"/>
           <p:cNvSpPr/>
           <p:nvPr/>
         </p:nvSpPr>
@@ -15013,7 +14887,7 @@
       </p:sp>
       <p:sp>
         <p:nvSpPr>
-          <p:cNvPr id="32" name="Text 27"/>
+          <p:cNvPr id="33" name="Text 27"/>
           <p:cNvSpPr/>
           <p:nvPr/>
         </p:nvSpPr>
@@ -15139,7 +15013,7 @@
         <p:spPr>
           <a:xfrm>
             <a:off x="457200" y="6492240"/>
-            <a:ext cx="640080" cy="274320"/>
+            <a:ext cx="493776" cy="274320"/>
           </a:xfrm>
           <a:prstGeom prst="rect">
             <a:avLst/>
@@ -15265,7 +15139,7 @@
       </p:sp>
       <p:sp>
         <p:nvSpPr>
-          <p:cNvPr id="8" name="Text 5"/>
+          <p:cNvPr id="9" name="Text 5"/>
           <p:cNvSpPr/>
           <p:nvPr/>
         </p:nvSpPr>
@@ -15304,7 +15178,7 @@
       </p:sp>
       <p:sp>
         <p:nvSpPr>
-          <p:cNvPr id="9" name="Shape 6"/>
+          <p:cNvPr id="10" name="Shape 6"/>
           <p:cNvSpPr/>
           <p:nvPr/>
         </p:nvSpPr>
@@ -15331,7 +15205,7 @@
       </p:sp>
       <p:sp>
         <p:nvSpPr>
-          <p:cNvPr id="10" name="Shape 7"/>
+          <p:cNvPr id="11" name="Shape 7"/>
           <p:cNvSpPr/>
           <p:nvPr/>
         </p:nvSpPr>
@@ -15353,7 +15227,7 @@
       </p:sp>
       <p:sp>
         <p:nvSpPr>
-          <p:cNvPr id="11" name="Text 8"/>
+          <p:cNvPr id="12" name="Text 8"/>
           <p:cNvSpPr/>
           <p:nvPr/>
         </p:nvSpPr>
@@ -15392,7 +15266,7 @@
       </p:sp>
       <p:sp>
         <p:nvSpPr>
-          <p:cNvPr id="12" name="Shape 9"/>
+          <p:cNvPr id="13" name="Shape 9"/>
           <p:cNvSpPr/>
           <p:nvPr/>
         </p:nvSpPr>
@@ -15424,7 +15298,7 @@
       </p:sp>
       <p:pic>
         <p:nvPicPr>
-          <p:cNvPr id="13" name="Image 1" descr="C:\Claude\MCG Full Stack\generators\assets\icons\answers.png">    </p:cNvPr>
+          <p:cNvPr id="14" name="Image 1" descr="C:\Claude\MCG Full Stack\generators\assets\icons\answers.png">    </p:cNvPr>
           <p:cNvPicPr>
             <a:picLocks noChangeAspect="1"/>
           </p:cNvPicPr>
@@ -15448,7 +15322,7 @@
       </p:pic>
       <p:sp>
         <p:nvSpPr>
-          <p:cNvPr id="14" name="Text 10"/>
+          <p:cNvPr id="15" name="Text 10"/>
           <p:cNvSpPr/>
           <p:nvPr/>
         </p:nvSpPr>
@@ -15490,7 +15364,7 @@
       </p:sp>
       <p:sp>
         <p:nvSpPr>
-          <p:cNvPr id="15" name="Text 11"/>
+          <p:cNvPr id="16" name="Text 11"/>
           <p:cNvSpPr/>
           <p:nvPr/>
         </p:nvSpPr>
@@ -15532,7 +15406,7 @@
       </p:sp>
       <p:sp>
         <p:nvSpPr>
-          <p:cNvPr id="16" name="Text 12"/>
+          <p:cNvPr id="17" name="Text 12"/>
           <p:cNvSpPr/>
           <p:nvPr/>
         </p:nvSpPr>
@@ -15574,7 +15448,7 @@
       </p:sp>
       <p:sp>
         <p:nvSpPr>
-          <p:cNvPr id="17" name="Text 13"/>
+          <p:cNvPr id="18" name="Text 13"/>
           <p:cNvSpPr/>
           <p:nvPr/>
         </p:nvSpPr>
@@ -15616,7 +15490,7 @@
       </p:sp>
       <p:sp>
         <p:nvSpPr>
-          <p:cNvPr id="18" name="Shape 14"/>
+          <p:cNvPr id="19" name="Shape 14"/>
           <p:cNvSpPr/>
           <p:nvPr/>
         </p:nvSpPr>
@@ -15643,7 +15517,7 @@
       </p:sp>
       <p:sp>
         <p:nvSpPr>
-          <p:cNvPr id="19" name="Shape 15"/>
+          <p:cNvPr id="20" name="Shape 15"/>
           <p:cNvSpPr/>
           <p:nvPr/>
         </p:nvSpPr>
@@ -15665,7 +15539,7 @@
       </p:sp>
       <p:sp>
         <p:nvSpPr>
-          <p:cNvPr id="20" name="Text 16"/>
+          <p:cNvPr id="21" name="Text 16"/>
           <p:cNvSpPr/>
           <p:nvPr/>
         </p:nvSpPr>
@@ -15704,7 +15578,7 @@
       </p:sp>
       <p:sp>
         <p:nvSpPr>
-          <p:cNvPr id="21" name="Shape 17"/>
+          <p:cNvPr id="22" name="Shape 17"/>
           <p:cNvSpPr/>
           <p:nvPr/>
         </p:nvSpPr>
@@ -15736,7 +15610,7 @@
       </p:sp>
       <p:pic>
         <p:nvPicPr>
-          <p:cNvPr id="22" name="Image 2" descr="C:\Claude\MCG Full Stack\generators\assets\icons\automation.png">    </p:cNvPr>
+          <p:cNvPr id="23" name="Image 2" descr="C:\Claude\MCG Full Stack\generators\assets\icons\automation.png">    </p:cNvPr>
           <p:cNvPicPr>
             <a:picLocks noChangeAspect="1"/>
           </p:cNvPicPr>
@@ -15760,7 +15634,7 @@
       </p:pic>
       <p:sp>
         <p:nvSpPr>
-          <p:cNvPr id="23" name="Text 18"/>
+          <p:cNvPr id="24" name="Text 18"/>
           <p:cNvSpPr/>
           <p:nvPr/>
         </p:nvSpPr>
@@ -15802,7 +15676,7 @@
       </p:sp>
       <p:sp>
         <p:nvSpPr>
-          <p:cNvPr id="24" name="Text 19"/>
+          <p:cNvPr id="25" name="Text 19"/>
           <p:cNvSpPr/>
           <p:nvPr/>
         </p:nvSpPr>
@@ -15844,7 +15718,7 @@
       </p:sp>
       <p:sp>
         <p:nvSpPr>
-          <p:cNvPr id="25" name="Text 20"/>
+          <p:cNvPr id="26" name="Text 20"/>
           <p:cNvSpPr/>
           <p:nvPr/>
         </p:nvSpPr>
@@ -15886,7 +15760,7 @@
       </p:sp>
       <p:sp>
         <p:nvSpPr>
-          <p:cNvPr id="26" name="Text 21"/>
+          <p:cNvPr id="27" name="Text 21"/>
           <p:cNvSpPr/>
           <p:nvPr/>
         </p:nvSpPr>
@@ -15928,7 +15802,7 @@
       </p:sp>
       <p:sp>
         <p:nvSpPr>
-          <p:cNvPr id="27" name="Text 22"/>
+          <p:cNvPr id="28" name="Text 22"/>
           <p:cNvSpPr/>
           <p:nvPr/>
         </p:nvSpPr>
@@ -15970,7 +15844,7 @@
       </p:sp>
       <p:sp>
         <p:nvSpPr>
-          <p:cNvPr id="28" name="Shape 23"/>
+          <p:cNvPr id="29" name="Shape 23"/>
           <p:cNvSpPr/>
           <p:nvPr/>
         </p:nvSpPr>
@@ -15992,7 +15866,7 @@
       </p:sp>
       <p:sp>
         <p:nvSpPr>
-          <p:cNvPr id="29" name="Text 24"/>
+          <p:cNvPr id="30" name="Text 24"/>
           <p:cNvSpPr/>
           <p:nvPr/>
         </p:nvSpPr>

--- a/MCG_Project_Qlarity_Summary.pptx
+++ b/MCG_Project_Qlarity_Summary.pptx
@@ -18,9 +18,10 @@
     <p:sldId id="266" r:id="rId12"/>
     <p:sldId id="267" r:id="rId13"/>
     <p:sldId id="268" r:id="rId14"/>
+    <p:sldId id="269" r:id="rId15"/>
   </p:sldIdLst>
   <p:notesMasterIdLst>
-    <p:notesMasterId r:id="rId15"/>
+    <p:notesMasterId r:id="rId16"/>
   </p:notesMasterIdLst>
   <p:sldSz cx="12192000" cy="6858000"/>
   <p:notesSz cx="6858000" cy="12192000"/>
@@ -908,6 +909,94 @@
 </p:notes>
 </file>
 
+<file path=ppt/notesSlides/notesSlide14.xml><?xml version="1.0" encoding="utf-8"?>
+<p:notes xmlns:a="http://schemas.openxmlformats.org/drawingml/2006/main" xmlns:r="http://schemas.openxmlformats.org/officeDocument/2006/relationships" xmlns:p="http://schemas.openxmlformats.org/presentationml/2006/main">
+  <p:cSld>
+    <p:spTree>
+      <p:nvGrpSpPr>
+        <p:cNvPr id="1" name=""/>
+        <p:cNvGrpSpPr/>
+        <p:nvPr/>
+      </p:nvGrpSpPr>
+      <p:grpSpPr>
+        <a:xfrm>
+          <a:off x="0" y="0"/>
+          <a:ext cx="0" cy="0"/>
+          <a:chOff x="0" y="0"/>
+          <a:chExt cx="0" cy="0"/>
+        </a:xfrm>
+      </p:grpSpPr>
+      <p:sp>
+        <p:nvSpPr>
+          <p:cNvPr id="2" name="Slide Image Placeholder 1"/>
+          <p:cNvSpPr>
+            <a:spLocks noGrp="1" noRot="1" noChangeAspect="1"/>
+          </p:cNvSpPr>
+          <p:nvPr>
+            <p:ph type="sldImg"/>
+          </p:nvPr>
+        </p:nvSpPr>
+        <p:spPr/>
+      </p:sp>
+      <p:sp>
+        <p:nvSpPr>
+          <p:cNvPr id="3" name="Notes Placeholder 2"/>
+          <p:cNvSpPr>
+            <a:spLocks noGrp="1"/>
+          </p:cNvSpPr>
+          <p:nvPr>
+            <p:ph type="body" idx="1"/>
+          </p:nvPr>
+        </p:nvSpPr>
+        <p:spPr/>
+        <p:txBody>
+          <a:bodyPr/>
+          <a:lstStyle/>
+          <a:p>
+            <a:r>
+              <a:rPr lang="en-US" dirty="0"/>
+              <a:t/>
+            </a:r>
+            <a:endParaRPr lang="en-US" dirty="0"/>
+          </a:p>
+        </p:txBody>
+      </p:sp>
+      <p:sp>
+        <p:nvSpPr>
+          <p:cNvPr id="4" name="Slide Number Placeholder 3"/>
+          <p:cNvSpPr>
+            <a:spLocks noGrp="1"/>
+          </p:cNvSpPr>
+          <p:nvPr>
+            <p:ph type="sldNum" sz="quarter" idx="10"/>
+          </p:nvPr>
+        </p:nvSpPr>
+        <p:spPr/>
+        <p:txBody>
+          <a:bodyPr/>
+          <a:lstStyle/>
+          <a:p>
+            <a:fld id="{F7021451-1387-4CA6-816F-3879F97B5CBC}" type="slidenum">
+              <a:rPr lang="en-US"/>
+              <a:t>14</a:t>
+            </a:fld>
+            <a:endParaRPr lang="en-US"/>
+          </a:p>
+        </p:txBody>
+      </p:sp>
+    </p:spTree>
+    <p:extLst>
+      <p:ext uri="{BB962C8B-B14F-4D97-AF65-F5344CB8AC3E}">
+        <p14:creationId xmlns:p14="http://schemas.microsoft.com/office/powerpoint/2010/main" val="1024086991"/>
+      </p:ext>
+    </p:extLst>
+  </p:cSld>
+  <p:clrMapOvr>
+    <a:masterClrMapping/>
+  </p:clrMapOvr>
+</p:notes>
+</file>
+
 <file path=ppt/notesSlides/notesSlide2.xml><?xml version="1.0" encoding="utf-8"?>
 <p:notes xmlns:a="http://schemas.openxmlformats.org/drawingml/2006/main" xmlns:r="http://schemas.openxmlformats.org/officeDocument/2006/relationships" xmlns:p="http://schemas.openxmlformats.org/presentationml/2006/main">
   <p:cSld>
@@ -6653,6 +6742,355 @@
               <a:t>Project Qlarity repository &amp; demo guide — [placeholder]</a:t>
             </a:r>
             <a:endParaRPr lang="en-US" sz="1200" dirty="0"/>
+          </a:p>
+        </p:txBody>
+      </p:sp>
+    </p:spTree>
+  </p:cSld>
+  <p:clrMapOvr>
+    <a:masterClrMapping/>
+  </p:clrMapOvr>
+</p:sld>
+</file>
+
+<file path=ppt/slides/slide14.xml><?xml version="1.0" encoding="utf-8"?>
+<p:sld xmlns:a="http://schemas.openxmlformats.org/drawingml/2006/main" xmlns:r="http://schemas.openxmlformats.org/officeDocument/2006/relationships" xmlns:p="http://schemas.openxmlformats.org/presentationml/2006/main">
+  <p:cSld name="Slide 14">
+    <p:bg>
+      <p:bgPr>
+        <a:solidFill>
+          <a:srgbClr val="FFFFFF"/>
+        </a:solidFill>
+      </p:bgPr>
+    </p:bg>
+    <p:spTree>
+      <p:nvGrpSpPr>
+        <p:cNvPr id="1" name=""/>
+        <p:cNvGrpSpPr/>
+        <p:nvPr/>
+      </p:nvGrpSpPr>
+      <p:grpSpPr>
+        <a:xfrm>
+          <a:off x="0" y="0"/>
+          <a:ext cx="0" cy="0"/>
+          <a:chOff x="0" y="0"/>
+          <a:chExt cx="0" cy="0"/>
+        </a:xfrm>
+      </p:grpSpPr>
+      <p:sp>
+        <p:nvSpPr>
+          <p:cNvPr id="2" name="Shape 0"/>
+          <p:cNvSpPr/>
+          <p:nvPr/>
+        </p:nvSpPr>
+        <p:spPr>
+          <a:xfrm>
+            <a:off x="0" y="0"/>
+            <a:ext cx="12188952" cy="45720"/>
+          </a:xfrm>
+          <a:prstGeom prst="rect">
+            <a:avLst/>
+          </a:prstGeom>
+          <a:solidFill>
+            <a:srgbClr val="006580"/>
+          </a:solidFill>
+          <a:ln/>
+        </p:spPr>
+      </p:sp>
+      <p:sp>
+        <p:nvSpPr>
+          <p:cNvPr id="3" name="Shape 1"/>
+          <p:cNvSpPr/>
+          <p:nvPr/>
+        </p:nvSpPr>
+        <p:spPr>
+          <a:xfrm>
+            <a:off x="457200" y="6400800"/>
+            <a:ext cx="11274552" cy="9144"/>
+          </a:xfrm>
+          <a:prstGeom prst="rect">
+            <a:avLst/>
+          </a:prstGeom>
+          <a:solidFill>
+            <a:srgbClr val="A9B3B6"/>
+          </a:solidFill>
+          <a:ln/>
+        </p:spPr>
+      </p:sp>
+      <p:pic>
+        <p:nvPicPr>
+          <p:cNvPr id="4" name="Image 0" descr="C:\Claude\MCG Full Stack\generators\assets\qlik_logo.png">    </p:cNvPr>
+          <p:cNvPicPr>
+            <a:picLocks noChangeAspect="1"/>
+          </p:cNvPicPr>
+          <p:nvPr/>
+        </p:nvPicPr>
+        <p:blipFill>
+          <a:blip r:embed="rId1"/>
+          <a:stretch>
+            <a:fillRect/>
+          </a:stretch>
+        </p:blipFill>
+        <p:spPr>
+          <a:xfrm>
+            <a:off x="457200" y="6492240"/>
+            <a:ext cx="493776" cy="274320"/>
+          </a:xfrm>
+          <a:prstGeom prst="rect">
+            <a:avLst/>
+          </a:prstGeom>
+        </p:spPr>
+      </p:pic>
+      <p:sp>
+        <p:nvSpPr>
+          <p:cNvPr id="5" name="Text 2"/>
+          <p:cNvSpPr/>
+          <p:nvPr/>
+        </p:nvSpPr>
+        <p:spPr>
+          <a:xfrm>
+            <a:off x="1280160" y="6492240"/>
+            <a:ext cx="7315200" cy="274320"/>
+          </a:xfrm>
+          <a:prstGeom prst="rect">
+            <a:avLst/>
+          </a:prstGeom>
+          <a:noFill/>
+          <a:ln/>
+        </p:spPr>
+        <p:txBody>
+          <a:bodyPr wrap="square" rtlCol="0" anchor="ctr"/>
+          <a:lstStyle/>
+          <a:p>
+            <a:pPr indent="0" marL="0">
+              <a:buNone/>
+            </a:pPr>
+            <a:r>
+              <a:rPr lang="en-US" sz="800" dirty="0">
+                <a:solidFill>
+                  <a:srgbClr val="A9B3B6"/>
+                </a:solidFill>
+                <a:latin typeface="Inter" pitchFamily="34" charset="0"/>
+                <a:ea typeface="Inter" pitchFamily="34" charset="-122"/>
+                <a:cs typeface="Inter" pitchFamily="34" charset="-120"/>
+              </a:rPr>
+              <a:t>Project Qlarity  •  MCG Demo  •  Qlik Cloud</a:t>
+            </a:r>
+            <a:endParaRPr lang="en-US" sz="800" dirty="0"/>
+          </a:p>
+        </p:txBody>
+      </p:sp>
+      <p:sp>
+        <p:nvSpPr>
+          <p:cNvPr id="6" name="Text 3"/>
+          <p:cNvSpPr/>
+          <p:nvPr/>
+        </p:nvSpPr>
+        <p:spPr>
+          <a:xfrm>
+            <a:off x="10972800" y="6492240"/>
+            <a:ext cx="914400" cy="274320"/>
+          </a:xfrm>
+          <a:prstGeom prst="rect">
+            <a:avLst/>
+          </a:prstGeom>
+          <a:noFill/>
+          <a:ln/>
+        </p:spPr>
+        <p:txBody>
+          <a:bodyPr wrap="square" rtlCol="0" anchor="ctr"/>
+          <a:lstStyle/>
+          <a:p>
+            <a:pPr algn="r" indent="0" marL="0">
+              <a:buNone/>
+            </a:pPr>
+            <a:r>
+              <a:rPr lang="en-US" sz="800" dirty="0">
+                <a:solidFill>
+                  <a:srgbClr val="A9B3B6"/>
+                </a:solidFill>
+                <a:latin typeface="Inter" pitchFamily="34" charset="0"/>
+                <a:ea typeface="Inter" pitchFamily="34" charset="-122"/>
+                <a:cs typeface="Inter" pitchFamily="34" charset="-120"/>
+              </a:rPr>
+              <a:t>14</a:t>
+            </a:r>
+            <a:endParaRPr lang="en-US" sz="800" dirty="0"/>
+          </a:p>
+        </p:txBody>
+      </p:sp>
+      <p:sp>
+        <p:nvSpPr>
+          <p:cNvPr id="7" name="Text 4"/>
+          <p:cNvSpPr/>
+          <p:nvPr/>
+        </p:nvSpPr>
+        <p:spPr>
+          <a:xfrm>
+            <a:off x="457200" y="182880"/>
+            <a:ext cx="8412480" cy="594360"/>
+          </a:xfrm>
+          <a:prstGeom prst="rect">
+            <a:avLst/>
+          </a:prstGeom>
+          <a:noFill/>
+          <a:ln/>
+        </p:spPr>
+        <p:txBody>
+          <a:bodyPr wrap="square" rtlCol="0" anchor="ctr"/>
+          <a:lstStyle/>
+          <a:p>
+            <a:pPr indent="0" marL="0">
+              <a:buNone/>
+            </a:pPr>
+            <a:r>
+              <a:rPr lang="en-US" sz="2600" b="1" dirty="0">
+                <a:solidFill>
+                  <a:srgbClr val="19416C"/>
+                </a:solidFill>
+                <a:latin typeface="Inter" pitchFamily="34" charset="0"/>
+                <a:ea typeface="Inter" pitchFamily="34" charset="-122"/>
+                <a:cs typeface="Inter" pitchFamily="34" charset="-120"/>
+              </a:rPr>
+              <a:t>Deploy Console</a:t>
+            </a:r>
+            <a:endParaRPr lang="en-US" sz="2600" dirty="0"/>
+          </a:p>
+        </p:txBody>
+      </p:sp>
+      <p:sp>
+        <p:nvSpPr>
+          <p:cNvPr id="8" name="Text 5"/>
+          <p:cNvSpPr/>
+          <p:nvPr/>
+        </p:nvSpPr>
+        <p:spPr>
+          <a:xfrm>
+            <a:off x="548640" y="749808"/>
+            <a:ext cx="11064240" cy="292608"/>
+          </a:xfrm>
+          <a:prstGeom prst="rect">
+            <a:avLst/>
+          </a:prstGeom>
+          <a:noFill/>
+          <a:ln/>
+        </p:spPr>
+        <p:txBody>
+          <a:bodyPr wrap="square" rtlCol="0" anchor="ctr"/>
+          <a:lstStyle/>
+          <a:p>
+            <a:pPr indent="0" marL="0">
+              <a:buNone/>
+            </a:pPr>
+            <a:r>
+              <a:rPr lang="en-US" sz="1100" dirty="0">
+                <a:solidFill>
+                  <a:srgbClr val="454659"/>
+                </a:solidFill>
+                <a:latin typeface="Inter" pitchFamily="34" charset="0"/>
+                <a:ea typeface="Inter" pitchFamily="34" charset="-122"/>
+                <a:cs typeface="Inter" pitchFamily="34" charset="-120"/>
+              </a:rPr>
+              <a:t>The whole environment deploys from one repository.</a:t>
+            </a:r>
+            <a:endParaRPr lang="en-US" sz="1100" dirty="0"/>
+          </a:p>
+        </p:txBody>
+      </p:sp>
+      <p:sp>
+        <p:nvSpPr>
+          <p:cNvPr id="9" name="Shape 6"/>
+          <p:cNvSpPr/>
+          <p:nvPr/>
+        </p:nvSpPr>
+        <p:spPr>
+          <a:xfrm>
+            <a:off x="1344168" y="1133856"/>
+            <a:ext cx="7754112" cy="4901184"/>
+          </a:xfrm>
+          <a:prstGeom prst="roundRect">
+            <a:avLst>
+              <a:gd name="adj" fmla="val 746"/>
+            </a:avLst>
+          </a:prstGeom>
+          <a:solidFill>
+            <a:srgbClr val="FFFFFF"/>
+          </a:solidFill>
+          <a:ln w="12700">
+            <a:solidFill>
+              <a:srgbClr val="A9B3B6"/>
+            </a:solidFill>
+            <a:prstDash val="solid"/>
+          </a:ln>
+          <a:effectLst>
+            <a:outerShdw sx="100000" sy="100000" kx="0" ky="0" algn="bl" rotWithShape="0" blurRad="76200" dist="25400" dir="16200000">
+              <a:srgbClr val="000000">
+                <a:alpha val="18000"/>
+              </a:srgbClr>
+            </a:outerShdw>
+          </a:effectLst>
+        </p:spPr>
+      </p:sp>
+      <p:pic>
+        <p:nvPicPr>
+          <p:cNvPr id="10" name="Image 1" descr="C:\Claude\MCG Full Stack\generators\assets\screenshots\deploy-ui-wizard.png">    </p:cNvPr>
+          <p:cNvPicPr>
+            <a:picLocks noChangeAspect="1"/>
+          </p:cNvPicPr>
+          <p:nvPr/>
+        </p:nvPicPr>
+        <p:blipFill>
+          <a:blip r:embed="rId2"/>
+          <a:stretch>
+            <a:fillRect/>
+          </a:stretch>
+        </p:blipFill>
+        <p:spPr>
+          <a:xfrm>
+            <a:off x="1417320" y="1207008"/>
+            <a:ext cx="7607808" cy="4754880"/>
+          </a:xfrm>
+          <a:prstGeom prst="rect">
+            <a:avLst/>
+          </a:prstGeom>
+        </p:spPr>
+      </p:pic>
+      <p:sp>
+        <p:nvSpPr>
+          <p:cNvPr id="11" name="Text 7"/>
+          <p:cNvSpPr/>
+          <p:nvPr/>
+        </p:nvSpPr>
+        <p:spPr>
+          <a:xfrm>
+            <a:off x="1344168" y="6089904"/>
+            <a:ext cx="7754112" cy="274320"/>
+          </a:xfrm>
+          <a:prstGeom prst="rect">
+            <a:avLst/>
+          </a:prstGeom>
+          <a:noFill/>
+          <a:ln/>
+        </p:spPr>
+        <p:txBody>
+          <a:bodyPr wrap="square" rtlCol="0" anchor="t"/>
+          <a:lstStyle/>
+          <a:p>
+            <a:pPr algn="ctr" indent="0" marL="0">
+              <a:buNone/>
+            </a:pPr>
+            <a:r>
+              <a:rPr lang="en-US" sz="1000" i="1" dirty="0">
+                <a:solidFill>
+                  <a:srgbClr val="6B7280"/>
+                </a:solidFill>
+                <a:latin typeface="Inter" pitchFamily="34" charset="0"/>
+                <a:ea typeface="Inter" pitchFamily="34" charset="-122"/>
+                <a:cs typeface="Inter" pitchFamily="34" charset="-120"/>
+              </a:rPr>
+              <a:t>The MCG deploy console — 11 setup steps, Stewardship at step 11</a:t>
+            </a:r>
+            <a:endParaRPr lang="en-US" sz="1000" dirty="0"/>
           </a:p>
         </p:txBody>
       </p:sp>

--- a/MCG_Project_Qlarity_Summary.pptx
+++ b/MCG_Project_Qlarity_Summary.pptx
@@ -1307,7 +1307,7 @@
           <a:p>
             <a:r>
               <a:rPr lang="en-US" dirty="0"/>
-              <a:t>One picture of the whole flow. Three source feeds — PostgreSQL WMS via CDC, Kafka IoT cold-chain streaming, and Salesforce every 15 minutes — land in the Open Lakehouse on Apache Iceberg, flow bronze to silver to gold, and surface as two governed gold data products that feed apps and AI. No copies; everything downstream reads trusted data.</a:t>
+              <a:t>One picture of the whole flow. Three source feeds — PostgreSQL WMS via CDC, Kafka IoT cold-chain streaming, and Meridian CRM every 15 minutes — land in the Open Lakehouse on Apache Iceberg, flow bronze to silver to gold, and surface as two governed gold data products that feed apps and AI. No copies; everything downstream reads trusted data.</a:t>
             </a:r>
             <a:endParaRPr lang="en-US" dirty="0"/>
           </a:p>
@@ -10916,7 +10916,7 @@
                 <a:ea typeface="Inter" pitchFamily="34" charset="-122"/>
                 <a:cs typeface="Inter" pitchFamily="34" charset="-120"/>
               </a:rPr>
-              <a:t>Salesforce CRM</a:t>
+              <a:t>Meridian CRM</a:t>
             </a:r>
             <a:endParaRPr lang="en-US" sz="1050" dirty="0"/>
           </a:p>
@@ -15211,7 +15211,7 @@
                 <a:ea typeface="Inter" pitchFamily="34" charset="-122"/>
                 <a:cs typeface="Inter" pitchFamily="34" charset="-120"/>
               </a:rPr>
-              <a:t>▸  3 data simulators: PostgreSQL, Kafka IoT, Salesforce</a:t>
+              <a:t>▸  3 data simulators: PostgreSQL WMS, Kafka IoT, Meridian CRM</a:t>
             </a:r>
             <a:endParaRPr lang="en-US" sz="1150" dirty="0"/>
           </a:p>
